--- a/code-graph-modernization/deck/code-graph-modernization.pptx
+++ b/code-graph-modernization/deck/code-graph-modernization.pptx
@@ -16,6 +16,7 @@
     <p:sldId id="264" r:id="rId15"/>
     <p:sldId id="265" r:id="rId16"/>
     <p:sldId id="266" r:id="rId17"/>
+    <p:sldId id="267" r:id="rId18"/>
   </p:sldIdLst>
   <p:sldSz cx="12191695" cy="6858000" type="screen4x3"/>
   <p:notesSz cx="6858000" cy="9144000"/>
@@ -3634,7 +3635,7 @@
                 </a:solidFill>
                 <a:latin typeface="Calibri"/>
               </a:rPr>
-              <a:t>ROADMAP</a:t>
+              <a:t>TRANSITION TO TCS / MASTERCRAFT</a:t>
             </a:r>
           </a:p>
         </p:txBody>
@@ -3676,7 +3677,7 @@
                 </a:solidFill>
                 <a:latin typeface="Calibri"/>
               </a:rPr>
-              <a:t>Where we are and what's next</a:t>
+              <a:t>One box changes — everything downstream is reused</a:t>
             </a:r>
           </a:p>
         </p:txBody>
@@ -3689,18 +3690,18 @@
         </p:nvSpPr>
         <p:spPr>
           <a:xfrm>
-            <a:off x="548640" y="1508760"/>
-            <a:ext cx="11064240" cy="1078992"/>
+            <a:off x="640080" y="1554480"/>
+            <a:ext cx="2514600" cy="1371600"/>
           </a:xfrm>
           <a:prstGeom prst="rect">
             <a:avLst/>
           </a:prstGeom>
           <a:solidFill>
-            <a:srgbClr val="FFFFFF"/>
+            <a:srgbClr val="E89B1D"/>
           </a:solidFill>
-          <a:ln w="12700">
+          <a:ln w="31750">
             <a:solidFill>
-              <a:srgbClr val="D5DDE3"/>
+              <a:srgbClr val="E89B1D"/>
             </a:solidFill>
           </a:ln>
           <a:effectLst/>
@@ -3729,20 +3730,81 @@
       </p:sp>
       <p:sp>
         <p:nvSpPr>
-          <p:cNvPr id="9" name="Rectangle 8"/>
+          <p:cNvPr id="9" name="TextBox 8"/>
+          <p:cNvSpPr txBox="1"/>
+          <p:nvPr/>
+        </p:nvSpPr>
+        <p:spPr>
+          <a:xfrm>
+            <a:off x="731520" y="1874520"/>
+            <a:ext cx="2331720" cy="822960"/>
+          </a:xfrm>
+          <a:prstGeom prst="rect">
+            <a:avLst/>
+          </a:prstGeom>
+          <a:noFill/>
+        </p:spPr>
+        <p:txBody>
+          <a:bodyPr wrap="square" anchor="t">
+            <a:spAutoFit/>
+          </a:bodyPr>
+          <a:lstStyle/>
+          <a:p>
+            <a:pPr algn="ctr">
+              <a:lnSpc>
+                <a:spcPct val="100000"/>
+              </a:lnSpc>
+              <a:spcAft>
+                <a:spcPts val="200"/>
+              </a:spcAft>
+            </a:pPr>
+            <a:r>
+              <a:rPr sz="1400" b="1" i="0">
+                <a:solidFill>
+                  <a:srgbClr val="FFFFFF"/>
+                </a:solidFill>
+                <a:latin typeface="Calibri"/>
+              </a:rPr>
+              <a:t>MasterCraft</a:t>
+            </a:r>
+          </a:p>
+          <a:p>
+            <a:pPr algn="ctr">
+              <a:lnSpc>
+                <a:spcPct val="100000"/>
+              </a:lnSpc>
+              <a:spcAft>
+                <a:spcPts val="200"/>
+              </a:spcAft>
+            </a:pPr>
+            <a:r>
+              <a:rPr sz="1400" b="1" i="0">
+                <a:solidFill>
+                  <a:srgbClr val="FFFFFF"/>
+                </a:solidFill>
+                <a:latin typeface="Calibri"/>
+              </a:rPr>
+              <a:t>inventory export</a:t>
+            </a:r>
+          </a:p>
+        </p:txBody>
+      </p:sp>
+      <p:sp>
+        <p:nvSpPr>
+          <p:cNvPr id="10" name="Rectangle 9"/>
           <p:cNvSpPr/>
           <p:nvPr/>
         </p:nvSpPr>
         <p:spPr>
           <a:xfrm>
-            <a:off x="548640" y="1508760"/>
-            <a:ext cx="914400" cy="1078992"/>
+            <a:off x="1097280" y="1170432"/>
+            <a:ext cx="1600200" cy="347472"/>
           </a:xfrm>
           <a:prstGeom prst="rect">
             <a:avLst/>
           </a:prstGeom>
           <a:solidFill>
-            <a:srgbClr val="0B2447"/>
+            <a:srgbClr val="E89B1D"/>
           </a:solidFill>
           <a:ln>
             <a:noFill/>
@@ -3764,23 +3826,32 @@
           </a:fontRef>
         </p:style>
         <p:txBody>
-          <a:bodyPr rtlCol="0" anchor="ctr"/>
+          <a:bodyPr rtlCol="0" anchor="ctr" wrap="square"/>
           <a:lstStyle/>
           <a:p>
             <a:pPr algn="ctr"/>
-          </a:p>
-        </p:txBody>
-      </p:sp>
-      <p:sp>
-        <p:nvSpPr>
-          <p:cNvPr id="10" name="TextBox 9"/>
+            <a:r>
+              <a:rPr sz="1000" b="1" i="0">
+                <a:solidFill>
+                  <a:srgbClr val="0B2447"/>
+                </a:solidFill>
+                <a:latin typeface="Calibri"/>
+              </a:rPr>
+              <a:t>CHANGES</a:t>
+            </a:r>
+          </a:p>
+        </p:txBody>
+      </p:sp>
+      <p:sp>
+        <p:nvSpPr>
+          <p:cNvPr id="11" name="TextBox 10"/>
           <p:cNvSpPr txBox="1"/>
           <p:nvPr/>
         </p:nvSpPr>
         <p:spPr>
           <a:xfrm>
-            <a:off x="548640" y="1801368"/>
-            <a:ext cx="914400" cy="548640"/>
+            <a:off x="3154680" y="2011680"/>
+            <a:ext cx="320040" cy="457200"/>
           </a:xfrm>
           <a:prstGeom prst="rect">
             <a:avLst/>
@@ -3802,27 +3873,73 @@
               </a:spcAft>
             </a:pPr>
             <a:r>
-              <a:rPr sz="2600" b="1" i="0">
-                <a:solidFill>
-                  <a:srgbClr val="FFFFFF"/>
-                </a:solidFill>
-                <a:latin typeface="Calibri"/>
-              </a:rPr>
-              <a:t>0</a:t>
-            </a:r>
-          </a:p>
-        </p:txBody>
-      </p:sp>
-      <p:sp>
-        <p:nvSpPr>
-          <p:cNvPr id="11" name="TextBox 10"/>
+              <a:rPr sz="1800" b="1" i="0">
+                <a:solidFill>
+                  <a:srgbClr val="3A4A5A"/>
+                </a:solidFill>
+                <a:latin typeface="Calibri"/>
+              </a:rPr>
+              <a:t>▶</a:t>
+            </a:r>
+          </a:p>
+        </p:txBody>
+      </p:sp>
+      <p:sp>
+        <p:nvSpPr>
+          <p:cNvPr id="12" name="Rectangle 11"/>
+          <p:cNvSpPr/>
+          <p:nvPr/>
+        </p:nvSpPr>
+        <p:spPr>
+          <a:xfrm>
+            <a:off x="3474720" y="1554480"/>
+            <a:ext cx="2514600" cy="1371600"/>
+          </a:xfrm>
+          <a:prstGeom prst="rect">
+            <a:avLst/>
+          </a:prstGeom>
+          <a:solidFill>
+            <a:srgbClr val="149EC8"/>
+          </a:solidFill>
+          <a:ln w="31750">
+            <a:solidFill>
+              <a:srgbClr val="149EC8"/>
+            </a:solidFill>
+          </a:ln>
+          <a:effectLst/>
+        </p:spPr>
+        <p:style>
+          <a:lnRef idx="1">
+            <a:schemeClr val="accent1"/>
+          </a:lnRef>
+          <a:fillRef idx="3">
+            <a:schemeClr val="accent1"/>
+          </a:fillRef>
+          <a:effectRef idx="2">
+            <a:schemeClr val="accent1"/>
+          </a:effectRef>
+          <a:fontRef idx="minor">
+            <a:schemeClr val="lt1"/>
+          </a:fontRef>
+        </p:style>
+        <p:txBody>
+          <a:bodyPr rtlCol="0" anchor="ctr"/>
+          <a:lstStyle/>
+          <a:p>
+            <a:pPr algn="ctr"/>
+          </a:p>
+        </p:txBody>
+      </p:sp>
+      <p:sp>
+        <p:nvSpPr>
+          <p:cNvPr id="13" name="TextBox 12"/>
           <p:cNvSpPr txBox="1"/>
           <p:nvPr/>
         </p:nvSpPr>
         <p:spPr>
           <a:xfrm>
-            <a:off x="1645920" y="1655064"/>
-            <a:ext cx="6949440" cy="822960"/>
+            <a:off x="3566160" y="1874520"/>
+            <a:ext cx="2331720" cy="822960"/>
           </a:xfrm>
           <a:prstGeom prst="rect">
             <a:avLst/>
@@ -3835,61 +3952,61 @@
           </a:bodyPr>
           <a:lstStyle/>
           <a:p>
-            <a:pPr algn="l">
+            <a:pPr algn="ctr">
               <a:lnSpc>
                 <a:spcPct val="100000"/>
               </a:lnSpc>
               <a:spcAft>
-                <a:spcPts val="300"/>
+                <a:spcPts val="200"/>
               </a:spcAft>
             </a:pPr>
             <a:r>
-              <a:rPr sz="1700" b="1" i="0">
-                <a:solidFill>
-                  <a:srgbClr val="0B2447"/>
-                </a:solidFill>
-                <a:latin typeface="Calibri"/>
-              </a:rPr>
-              <a:t>Schema alignment</a:t>
-            </a:r>
-          </a:p>
-          <a:p>
-            <a:pPr algn="l">
+              <a:rPr sz="1400" b="1" i="0">
+                <a:solidFill>
+                  <a:srgbClr val="FFFFFF"/>
+                </a:solidFill>
+                <a:latin typeface="Calibri"/>
+              </a:rPr>
+              <a:t>Adapter</a:t>
+            </a:r>
+          </a:p>
+          <a:p>
+            <a:pPr algn="ctr">
               <a:lnSpc>
                 <a:spcPct val="100000"/>
               </a:lnSpc>
               <a:spcAft>
-                <a:spcPts val="300"/>
+                <a:spcPts val="200"/>
               </a:spcAft>
             </a:pPr>
             <a:r>
-              <a:rPr sz="1300" b="0" i="0">
-                <a:solidFill>
-                  <a:srgbClr val="3A4A5A"/>
-                </a:solidFill>
-                <a:latin typeface="Calibri"/>
-              </a:rPr>
-              <a:t>Confirm MasterCraft export maps onto KDM-lite nodes/edges</a:t>
-            </a:r>
-          </a:p>
-        </p:txBody>
-      </p:sp>
-      <p:sp>
-        <p:nvSpPr>
-          <p:cNvPr id="12" name="Rectangle 11"/>
+              <a:rPr sz="1400" b="1" i="0">
+                <a:solidFill>
+                  <a:srgbClr val="FFFFFF"/>
+                </a:solidFill>
+                <a:latin typeface="Calibri"/>
+              </a:rPr>
+              <a:t>(maps to KDM-lite)</a:t>
+            </a:r>
+          </a:p>
+        </p:txBody>
+      </p:sp>
+      <p:sp>
+        <p:nvSpPr>
+          <p:cNvPr id="14" name="Rectangle 13"/>
           <p:cNvSpPr/>
           <p:nvPr/>
         </p:nvSpPr>
         <p:spPr>
           <a:xfrm>
-            <a:off x="9738360" y="1856232"/>
-            <a:ext cx="1691640" cy="384048"/>
+            <a:off x="3931920" y="1170432"/>
+            <a:ext cx="1600200" cy="347472"/>
           </a:xfrm>
           <a:prstGeom prst="rect">
             <a:avLst/>
           </a:prstGeom>
           <a:solidFill>
-            <a:srgbClr val="149EC8"/>
+            <a:srgbClr val="E89B1D"/>
           </a:solidFill>
           <a:ln>
             <a:noFill/>
@@ -3916,104 +4033,14 @@
           <a:p>
             <a:pPr algn="ctr"/>
             <a:r>
-              <a:rPr sz="1200" b="1" i="0">
-                <a:solidFill>
-                  <a:srgbClr val="FFFFFF"/>
-                </a:solidFill>
-                <a:latin typeface="Calibri"/>
-              </a:rPr>
-              <a:t>Ready</a:t>
-            </a:r>
-          </a:p>
-        </p:txBody>
-      </p:sp>
-      <p:sp>
-        <p:nvSpPr>
-          <p:cNvPr id="13" name="Rectangle 12"/>
-          <p:cNvSpPr/>
-          <p:nvPr/>
-        </p:nvSpPr>
-        <p:spPr>
-          <a:xfrm>
-            <a:off x="548640" y="2660904"/>
-            <a:ext cx="11064240" cy="1078992"/>
-          </a:xfrm>
-          <a:prstGeom prst="rect">
-            <a:avLst/>
-          </a:prstGeom>
-          <a:solidFill>
-            <a:srgbClr val="FFFFFF"/>
-          </a:solidFill>
-          <a:ln w="12700">
-            <a:solidFill>
-              <a:srgbClr val="D5DDE3"/>
-            </a:solidFill>
-          </a:ln>
-          <a:effectLst/>
-        </p:spPr>
-        <p:style>
-          <a:lnRef idx="1">
-            <a:schemeClr val="accent1"/>
-          </a:lnRef>
-          <a:fillRef idx="3">
-            <a:schemeClr val="accent1"/>
-          </a:fillRef>
-          <a:effectRef idx="2">
-            <a:schemeClr val="accent1"/>
-          </a:effectRef>
-          <a:fontRef idx="minor">
-            <a:schemeClr val="lt1"/>
-          </a:fontRef>
-        </p:style>
-        <p:txBody>
-          <a:bodyPr rtlCol="0" anchor="ctr"/>
-          <a:lstStyle/>
-          <a:p>
-            <a:pPr algn="ctr"/>
-          </a:p>
-        </p:txBody>
-      </p:sp>
-      <p:sp>
-        <p:nvSpPr>
-          <p:cNvPr id="14" name="Rectangle 13"/>
-          <p:cNvSpPr/>
-          <p:nvPr/>
-        </p:nvSpPr>
-        <p:spPr>
-          <a:xfrm>
-            <a:off x="548640" y="2660904"/>
-            <a:ext cx="914400" cy="1078992"/>
-          </a:xfrm>
-          <a:prstGeom prst="rect">
-            <a:avLst/>
-          </a:prstGeom>
-          <a:solidFill>
-            <a:srgbClr val="0B2447"/>
-          </a:solidFill>
-          <a:ln>
-            <a:noFill/>
-          </a:ln>
-          <a:effectLst/>
-        </p:spPr>
-        <p:style>
-          <a:lnRef idx="1">
-            <a:schemeClr val="accent1"/>
-          </a:lnRef>
-          <a:fillRef idx="3">
-            <a:schemeClr val="accent1"/>
-          </a:fillRef>
-          <a:effectRef idx="2">
-            <a:schemeClr val="accent1"/>
-          </a:effectRef>
-          <a:fontRef idx="minor">
-            <a:schemeClr val="lt1"/>
-          </a:fontRef>
-        </p:style>
-        <p:txBody>
-          <a:bodyPr rtlCol="0" anchor="ctr"/>
-          <a:lstStyle/>
-          <a:p>
-            <a:pPr algn="ctr"/>
+              <a:rPr sz="1000" b="1" i="0">
+                <a:solidFill>
+                  <a:srgbClr val="0B2447"/>
+                </a:solidFill>
+                <a:latin typeface="Calibri"/>
+              </a:rPr>
+              <a:t>CHANGES</a:t>
+            </a:r>
           </a:p>
         </p:txBody>
       </p:sp>
@@ -4025,8 +4052,8 @@
         </p:nvSpPr>
         <p:spPr>
           <a:xfrm>
-            <a:off x="548640" y="2953512"/>
-            <a:ext cx="914400" cy="548640"/>
+            <a:off x="5989320" y="2011680"/>
+            <a:ext cx="320040" cy="457200"/>
           </a:xfrm>
           <a:prstGeom prst="rect">
             <a:avLst/>
@@ -4048,27 +4075,73 @@
               </a:spcAft>
             </a:pPr>
             <a:r>
-              <a:rPr sz="2600" b="1" i="0">
-                <a:solidFill>
-                  <a:srgbClr val="FFFFFF"/>
-                </a:solidFill>
-                <a:latin typeface="Calibri"/>
-              </a:rPr>
-              <a:t>1</a:t>
-            </a:r>
-          </a:p>
-        </p:txBody>
-      </p:sp>
-      <p:sp>
-        <p:nvSpPr>
-          <p:cNvPr id="16" name="TextBox 15"/>
+              <a:rPr sz="1800" b="1" i="0">
+                <a:solidFill>
+                  <a:srgbClr val="3A4A5A"/>
+                </a:solidFill>
+                <a:latin typeface="Calibri"/>
+              </a:rPr>
+              <a:t>▶</a:t>
+            </a:r>
+          </a:p>
+        </p:txBody>
+      </p:sp>
+      <p:sp>
+        <p:nvSpPr>
+          <p:cNvPr id="16" name="Rectangle 15"/>
+          <p:cNvSpPr/>
+          <p:nvPr/>
+        </p:nvSpPr>
+        <p:spPr>
+          <a:xfrm>
+            <a:off x="6309360" y="1554480"/>
+            <a:ext cx="2514600" cy="1371600"/>
+          </a:xfrm>
+          <a:prstGeom prst="rect">
+            <a:avLst/>
+          </a:prstGeom>
+          <a:solidFill>
+            <a:srgbClr val="FFFFFF"/>
+          </a:solidFill>
+          <a:ln w="31750">
+            <a:solidFill>
+              <a:srgbClr val="0B2447"/>
+            </a:solidFill>
+          </a:ln>
+          <a:effectLst/>
+        </p:spPr>
+        <p:style>
+          <a:lnRef idx="1">
+            <a:schemeClr val="accent1"/>
+          </a:lnRef>
+          <a:fillRef idx="3">
+            <a:schemeClr val="accent1"/>
+          </a:fillRef>
+          <a:effectRef idx="2">
+            <a:schemeClr val="accent1"/>
+          </a:effectRef>
+          <a:fontRef idx="minor">
+            <a:schemeClr val="lt1"/>
+          </a:fontRef>
+        </p:style>
+        <p:txBody>
+          <a:bodyPr rtlCol="0" anchor="ctr"/>
+          <a:lstStyle/>
+          <a:p>
+            <a:pPr algn="ctr"/>
+          </a:p>
+        </p:txBody>
+      </p:sp>
+      <p:sp>
+        <p:nvSpPr>
+          <p:cNvPr id="17" name="TextBox 16"/>
           <p:cNvSpPr txBox="1"/>
           <p:nvPr/>
         </p:nvSpPr>
         <p:spPr>
           <a:xfrm>
-            <a:off x="1645920" y="2807208"/>
-            <a:ext cx="6949440" cy="822960"/>
+            <a:off x="6400800" y="1874520"/>
+            <a:ext cx="2331720" cy="822960"/>
           </a:xfrm>
           <a:prstGeom prst="rect">
             <a:avLst/>
@@ -4081,55 +4154,36 @@
           </a:bodyPr>
           <a:lstStyle/>
           <a:p>
-            <a:pPr algn="l">
+            <a:pPr algn="ctr">
               <a:lnSpc>
                 <a:spcPct val="100000"/>
               </a:lnSpc>
               <a:spcAft>
-                <a:spcPts val="300"/>
+                <a:spcPts val="200"/>
               </a:spcAft>
             </a:pPr>
             <a:r>
-              <a:rPr sz="1700" b="1" i="0">
+              <a:rPr sz="1400" b="1" i="0">
                 <a:solidFill>
                   <a:srgbClr val="0B2447"/>
                 </a:solidFill>
                 <a:latin typeface="Calibri"/>
               </a:rPr>
-              <a:t>This sandbox</a:t>
-            </a:r>
-          </a:p>
-          <a:p>
-            <a:pPr algn="l">
-              <a:lnSpc>
-                <a:spcPct val="100000"/>
-              </a:lnSpc>
-              <a:spcAft>
-                <a:spcPts val="300"/>
-              </a:spcAft>
-            </a:pPr>
-            <a:r>
-              <a:rPr sz="1300" b="0" i="0">
-                <a:solidFill>
-                  <a:srgbClr val="3A4A5A"/>
-                </a:solidFill>
-                <a:latin typeface="Calibri"/>
-              </a:rPr>
-              <a:t>Prove extract → graph → cluster → spec on open COBOL</a:t>
-            </a:r>
-          </a:p>
-        </p:txBody>
-      </p:sp>
-      <p:sp>
-        <p:nvSpPr>
-          <p:cNvPr id="17" name="Rectangle 16"/>
+              <a:t>Same graph.json</a:t>
+            </a:r>
+          </a:p>
+        </p:txBody>
+      </p:sp>
+      <p:sp>
+        <p:nvSpPr>
+          <p:cNvPr id="18" name="Rectangle 17"/>
           <p:cNvSpPr/>
           <p:nvPr/>
         </p:nvSpPr>
         <p:spPr>
           <a:xfrm>
-            <a:off x="9738360" y="3008376"/>
-            <a:ext cx="1691640" cy="384048"/>
+            <a:off x="6812280" y="1170432"/>
+            <a:ext cx="1508760" cy="347472"/>
           </a:xfrm>
           <a:prstGeom prst="rect">
             <a:avLst/>
@@ -4162,117 +4216,27 @@
           <a:p>
             <a:pPr algn="ctr"/>
             <a:r>
-              <a:rPr sz="1200" b="1" i="0">
+              <a:rPr sz="1000" b="1" i="0">
                 <a:solidFill>
                   <a:srgbClr val="FFFFFF"/>
                 </a:solidFill>
                 <a:latin typeface="Calibri"/>
               </a:rPr>
-              <a:t>Done</a:t>
-            </a:r>
-          </a:p>
-        </p:txBody>
-      </p:sp>
-      <p:sp>
-        <p:nvSpPr>
-          <p:cNvPr id="18" name="Rectangle 17"/>
-          <p:cNvSpPr/>
-          <p:nvPr/>
-        </p:nvSpPr>
-        <p:spPr>
-          <a:xfrm>
-            <a:off x="548640" y="3813048"/>
-            <a:ext cx="11064240" cy="1078992"/>
-          </a:xfrm>
-          <a:prstGeom prst="rect">
-            <a:avLst/>
-          </a:prstGeom>
-          <a:solidFill>
-            <a:srgbClr val="FFFFFF"/>
-          </a:solidFill>
-          <a:ln w="12700">
-            <a:solidFill>
-              <a:srgbClr val="D5DDE3"/>
-            </a:solidFill>
-          </a:ln>
-          <a:effectLst/>
-        </p:spPr>
-        <p:style>
-          <a:lnRef idx="1">
-            <a:schemeClr val="accent1"/>
-          </a:lnRef>
-          <a:fillRef idx="3">
-            <a:schemeClr val="accent1"/>
-          </a:fillRef>
-          <a:effectRef idx="2">
-            <a:schemeClr val="accent1"/>
-          </a:effectRef>
-          <a:fontRef idx="minor">
-            <a:schemeClr val="lt1"/>
-          </a:fontRef>
-        </p:style>
-        <p:txBody>
-          <a:bodyPr rtlCol="0" anchor="ctr"/>
-          <a:lstStyle/>
-          <a:p>
-            <a:pPr algn="ctr"/>
-          </a:p>
-        </p:txBody>
-      </p:sp>
-      <p:sp>
-        <p:nvSpPr>
-          <p:cNvPr id="19" name="Rectangle 18"/>
-          <p:cNvSpPr/>
-          <p:nvPr/>
-        </p:nvSpPr>
-        <p:spPr>
-          <a:xfrm>
-            <a:off x="548640" y="3813048"/>
-            <a:ext cx="914400" cy="1078992"/>
-          </a:xfrm>
-          <a:prstGeom prst="rect">
-            <a:avLst/>
-          </a:prstGeom>
-          <a:solidFill>
-            <a:srgbClr val="0B2447"/>
-          </a:solidFill>
-          <a:ln>
-            <a:noFill/>
-          </a:ln>
-          <a:effectLst/>
-        </p:spPr>
-        <p:style>
-          <a:lnRef idx="1">
-            <a:schemeClr val="accent1"/>
-          </a:lnRef>
-          <a:fillRef idx="3">
-            <a:schemeClr val="accent1"/>
-          </a:fillRef>
-          <a:effectRef idx="2">
-            <a:schemeClr val="accent1"/>
-          </a:effectRef>
-          <a:fontRef idx="minor">
-            <a:schemeClr val="lt1"/>
-          </a:fontRef>
-        </p:style>
-        <p:txBody>
-          <a:bodyPr rtlCol="0" anchor="ctr"/>
-          <a:lstStyle/>
-          <a:p>
-            <a:pPr algn="ctr"/>
-          </a:p>
-        </p:txBody>
-      </p:sp>
-      <p:sp>
-        <p:nvSpPr>
-          <p:cNvPr id="20" name="TextBox 19"/>
+              <a:t>REUSED</a:t>
+            </a:r>
+          </a:p>
+        </p:txBody>
+      </p:sp>
+      <p:sp>
+        <p:nvSpPr>
+          <p:cNvPr id="19" name="TextBox 18"/>
           <p:cNvSpPr txBox="1"/>
           <p:nvPr/>
         </p:nvSpPr>
         <p:spPr>
           <a:xfrm>
-            <a:off x="548640" y="4105656"/>
-            <a:ext cx="914400" cy="548640"/>
+            <a:off x="8823960" y="2011680"/>
+            <a:ext cx="320040" cy="457200"/>
           </a:xfrm>
           <a:prstGeom prst="rect">
             <a:avLst/>
@@ -4294,14 +4258,60 @@
               </a:spcAft>
             </a:pPr>
             <a:r>
-              <a:rPr sz="2600" b="1" i="0">
-                <a:solidFill>
-                  <a:srgbClr val="FFFFFF"/>
-                </a:solidFill>
-                <a:latin typeface="Calibri"/>
-              </a:rPr>
-              <a:t>2</a:t>
-            </a:r>
+              <a:rPr sz="1800" b="1" i="0">
+                <a:solidFill>
+                  <a:srgbClr val="3A4A5A"/>
+                </a:solidFill>
+                <a:latin typeface="Calibri"/>
+              </a:rPr>
+              <a:t>▶</a:t>
+            </a:r>
+          </a:p>
+        </p:txBody>
+      </p:sp>
+      <p:sp>
+        <p:nvSpPr>
+          <p:cNvPr id="20" name="Rectangle 19"/>
+          <p:cNvSpPr/>
+          <p:nvPr/>
+        </p:nvSpPr>
+        <p:spPr>
+          <a:xfrm>
+            <a:off x="9144000" y="1554480"/>
+            <a:ext cx="2514600" cy="1371600"/>
+          </a:xfrm>
+          <a:prstGeom prst="rect">
+            <a:avLst/>
+          </a:prstGeom>
+          <a:solidFill>
+            <a:srgbClr val="FFFFFF"/>
+          </a:solidFill>
+          <a:ln w="31750">
+            <a:solidFill>
+              <a:srgbClr val="3A4A5A"/>
+            </a:solidFill>
+          </a:ln>
+          <a:effectLst/>
+        </p:spPr>
+        <p:style>
+          <a:lnRef idx="1">
+            <a:schemeClr val="accent1"/>
+          </a:lnRef>
+          <a:fillRef idx="3">
+            <a:schemeClr val="accent1"/>
+          </a:fillRef>
+          <a:effectRef idx="2">
+            <a:schemeClr val="accent1"/>
+          </a:effectRef>
+          <a:fontRef idx="minor">
+            <a:schemeClr val="lt1"/>
+          </a:fontRef>
+        </p:style>
+        <p:txBody>
+          <a:bodyPr rtlCol="0" anchor="ctr"/>
+          <a:lstStyle/>
+          <a:p>
+            <a:pPr algn="ctr"/>
           </a:p>
         </p:txBody>
       </p:sp>
@@ -4313,8 +4323,8 @@
         </p:nvSpPr>
         <p:spPr>
           <a:xfrm>
-            <a:off x="1645920" y="3959352"/>
-            <a:ext cx="6949440" cy="822960"/>
+            <a:off x="9235440" y="1874520"/>
+            <a:ext cx="2331720" cy="822960"/>
           </a:xfrm>
           <a:prstGeom prst="rect">
             <a:avLst/>
@@ -4327,41 +4337,41 @@
           </a:bodyPr>
           <a:lstStyle/>
           <a:p>
-            <a:pPr algn="l">
+            <a:pPr algn="ctr">
               <a:lnSpc>
                 <a:spcPct val="100000"/>
               </a:lnSpc>
               <a:spcAft>
-                <a:spcPts val="300"/>
+                <a:spcPts val="200"/>
               </a:spcAft>
             </a:pPr>
             <a:r>
-              <a:rPr sz="1700" b="1" i="0">
-                <a:solidFill>
-                  <a:srgbClr val="0B2447"/>
-                </a:solidFill>
-                <a:latin typeface="Calibri"/>
-              </a:rPr>
-              <a:t>GraphRAG enrichment</a:t>
-            </a:r>
-          </a:p>
-          <a:p>
-            <a:pPr algn="l">
+              <a:rPr sz="1400" b="1" i="0">
+                <a:solidFill>
+                  <a:srgbClr val="3A4A5A"/>
+                </a:solidFill>
+                <a:latin typeface="Calibri"/>
+              </a:rPr>
+              <a:t>Neo4j · cluster ·</a:t>
+            </a:r>
+          </a:p>
+          <a:p>
+            <a:pPr algn="ctr">
               <a:lnSpc>
                 <a:spcPct val="100000"/>
               </a:lnSpc>
               <a:spcAft>
-                <a:spcPts val="300"/>
+                <a:spcPts val="200"/>
               </a:spcAft>
             </a:pPr>
             <a:r>
-              <a:rPr sz="1300" b="0" i="0">
+              <a:rPr sz="1400" b="1" i="0">
                 <a:solidFill>
                   <a:srgbClr val="3A4A5A"/>
                 </a:solidFill>
                 <a:latin typeface="Calibri"/>
               </a:rPr>
-              <a:t>Semantic retrieval + richer narratives; broaden coverage</a:t>
+              <a:t>specs · GraphRAG</a:t>
             </a:r>
           </a:p>
         </p:txBody>
@@ -4374,14 +4384,14 @@
         </p:nvSpPr>
         <p:spPr>
           <a:xfrm>
-            <a:off x="9738360" y="4160520"/>
-            <a:ext cx="1691640" cy="384048"/>
+            <a:off x="9646920" y="1170432"/>
+            <a:ext cx="1508760" cy="347472"/>
           </a:xfrm>
           <a:prstGeom prst="rect">
             <a:avLst/>
           </a:prstGeom>
           <a:solidFill>
-            <a:srgbClr val="E89B1D"/>
+            <a:srgbClr val="2E8B57"/>
           </a:solidFill>
           <a:ln>
             <a:noFill/>
@@ -4408,117 +4418,27 @@
           <a:p>
             <a:pPr algn="ctr"/>
             <a:r>
-              <a:rPr sz="1200" b="1" i="0">
+              <a:rPr sz="1000" b="1" i="0">
                 <a:solidFill>
                   <a:srgbClr val="FFFFFF"/>
                 </a:solidFill>
                 <a:latin typeface="Calibri"/>
               </a:rPr>
-              <a:t>In progress</a:t>
-            </a:r>
-          </a:p>
-        </p:txBody>
-      </p:sp>
-      <p:sp>
-        <p:nvSpPr>
-          <p:cNvPr id="23" name="Rectangle 22"/>
-          <p:cNvSpPr/>
-          <p:nvPr/>
-        </p:nvSpPr>
-        <p:spPr>
-          <a:xfrm>
-            <a:off x="548640" y="4965192"/>
-            <a:ext cx="11064240" cy="1078992"/>
-          </a:xfrm>
-          <a:prstGeom prst="rect">
-            <a:avLst/>
-          </a:prstGeom>
-          <a:solidFill>
-            <a:srgbClr val="FFFFFF"/>
-          </a:solidFill>
-          <a:ln w="12700">
-            <a:solidFill>
-              <a:srgbClr val="D5DDE3"/>
-            </a:solidFill>
-          </a:ln>
-          <a:effectLst/>
-        </p:spPr>
-        <p:style>
-          <a:lnRef idx="1">
-            <a:schemeClr val="accent1"/>
-          </a:lnRef>
-          <a:fillRef idx="3">
-            <a:schemeClr val="accent1"/>
-          </a:fillRef>
-          <a:effectRef idx="2">
-            <a:schemeClr val="accent1"/>
-          </a:effectRef>
-          <a:fontRef idx="minor">
-            <a:schemeClr val="lt1"/>
-          </a:fontRef>
-        </p:style>
-        <p:txBody>
-          <a:bodyPr rtlCol="0" anchor="ctr"/>
-          <a:lstStyle/>
-          <a:p>
-            <a:pPr algn="ctr"/>
-          </a:p>
-        </p:txBody>
-      </p:sp>
-      <p:sp>
-        <p:nvSpPr>
-          <p:cNvPr id="24" name="Rectangle 23"/>
-          <p:cNvSpPr/>
-          <p:nvPr/>
-        </p:nvSpPr>
-        <p:spPr>
-          <a:xfrm>
-            <a:off x="548640" y="4965192"/>
-            <a:ext cx="914400" cy="1078992"/>
-          </a:xfrm>
-          <a:prstGeom prst="rect">
-            <a:avLst/>
-          </a:prstGeom>
-          <a:solidFill>
-            <a:srgbClr val="0B2447"/>
-          </a:solidFill>
-          <a:ln>
-            <a:noFill/>
-          </a:ln>
-          <a:effectLst/>
-        </p:spPr>
-        <p:style>
-          <a:lnRef idx="1">
-            <a:schemeClr val="accent1"/>
-          </a:lnRef>
-          <a:fillRef idx="3">
-            <a:schemeClr val="accent1"/>
-          </a:fillRef>
-          <a:effectRef idx="2">
-            <a:schemeClr val="accent1"/>
-          </a:effectRef>
-          <a:fontRef idx="minor">
-            <a:schemeClr val="lt1"/>
-          </a:fontRef>
-        </p:style>
-        <p:txBody>
-          <a:bodyPr rtlCol="0" anchor="ctr"/>
-          <a:lstStyle/>
-          <a:p>
-            <a:pPr algn="ctr"/>
-          </a:p>
-        </p:txBody>
-      </p:sp>
-      <p:sp>
-        <p:nvSpPr>
-          <p:cNvPr id="25" name="TextBox 24"/>
+              <a:t>REUSED</a:t>
+            </a:r>
+          </a:p>
+        </p:txBody>
+      </p:sp>
+      <p:sp>
+        <p:nvSpPr>
+          <p:cNvPr id="23" name="TextBox 22"/>
           <p:cNvSpPr txBox="1"/>
           <p:nvPr/>
         </p:nvSpPr>
         <p:spPr>
           <a:xfrm>
-            <a:off x="548640" y="5257800"/>
-            <a:ext cx="914400" cy="548640"/>
+            <a:off x="548640" y="3566160"/>
+            <a:ext cx="11064240" cy="5120640"/>
           </a:xfrm>
           <a:prstGeom prst="rect">
             <a:avLst/>
@@ -4531,136 +4451,87 @@
           </a:bodyPr>
           <a:lstStyle/>
           <a:p>
-            <a:pPr algn="ctr">
+            <a:pPr algn="l">
               <a:lnSpc>
-                <a:spcPct val="100000"/>
+                <a:spcPct val="105000"/>
               </a:lnSpc>
               <a:spcAft>
-                <a:spcPts val="600"/>
+                <a:spcPts val="1200"/>
               </a:spcAft>
             </a:pPr>
             <a:r>
-              <a:rPr sz="2600" b="1" i="0">
-                <a:solidFill>
-                  <a:srgbClr val="FFFFFF"/>
-                </a:solidFill>
-                <a:latin typeface="Calibri"/>
-              </a:rPr>
-              <a:t>3</a:t>
-            </a:r>
-          </a:p>
-        </p:txBody>
-      </p:sp>
-      <p:sp>
-        <p:nvSpPr>
-          <p:cNvPr id="26" name="TextBox 25"/>
-          <p:cNvSpPr txBox="1"/>
-          <p:nvPr/>
-        </p:nvSpPr>
-        <p:spPr>
-          <a:xfrm>
-            <a:off x="1645920" y="5111496"/>
-            <a:ext cx="6949440" cy="822960"/>
-          </a:xfrm>
-          <a:prstGeom prst="rect">
-            <a:avLst/>
-          </a:prstGeom>
-          <a:noFill/>
-        </p:spPr>
-        <p:txBody>
-          <a:bodyPr wrap="square" anchor="t">
-            <a:spAutoFit/>
-          </a:bodyPr>
-          <a:lstStyle/>
+              <a:rPr sz="1500" b="1" i="0">
+                <a:solidFill>
+                  <a:srgbClr val="149EC8"/>
+                </a:solidFill>
+                <a:latin typeface="Calibri"/>
+              </a:rPr>
+              <a:t>▸  </a:t>
+            </a:r>
+            <a:r>
+              <a:rPr sz="1500" b="1" i="0">
+                <a:solidFill>
+                  <a:srgbClr val="0B2447"/>
+                </a:solidFill>
+                <a:latin typeface="Calibri"/>
+              </a:rPr>
+              <a:t>Choosing a KDM-aligned schema for the sandbox is what makes this a remapping of sources, not a redesign.</a:t>
+            </a:r>
+          </a:p>
           <a:p>
             <a:pPr algn="l">
               <a:lnSpc>
-                <a:spcPct val="100000"/>
+                <a:spcPct val="105000"/>
               </a:lnSpc>
               <a:spcAft>
-                <a:spcPts val="300"/>
+                <a:spcPts val="1200"/>
               </a:spcAft>
             </a:pPr>
             <a:r>
-              <a:rPr sz="1700" b="1" i="0">
-                <a:solidFill>
-                  <a:srgbClr val="0B2447"/>
-                </a:solidFill>
-                <a:latin typeface="Calibri"/>
-              </a:rPr>
-              <a:t>Target mapping</a:t>
+              <a:rPr sz="1500" b="1" i="0">
+                <a:solidFill>
+                  <a:srgbClr val="149EC8"/>
+                </a:solidFill>
+                <a:latin typeface="Calibri"/>
+              </a:rPr>
+              <a:t>▸  </a:t>
+            </a:r>
+            <a:r>
+              <a:rPr sz="1500" b="0" i="0">
+                <a:solidFill>
+                  <a:srgbClr val="3A4A5A"/>
+                </a:solidFill>
+                <a:latin typeface="Calibri"/>
+              </a:rPr>
+              <a:t>graph.json format, Neo4j loader, clustering, spec generation, GraphRAG config — all reused unchanged.</a:t>
             </a:r>
           </a:p>
           <a:p>
             <a:pPr algn="l">
               <a:lnSpc>
-                <a:spcPct val="100000"/>
+                <a:spcPct val="105000"/>
               </a:lnSpc>
               <a:spcAft>
-                <a:spcPts val="300"/>
+                <a:spcPts val="1200"/>
               </a:spcAft>
             </a:pPr>
             <a:r>
-              <a:rPr sz="1300" b="0" i="0">
-                <a:solidFill>
-                  <a:srgbClr val="3A4A5A"/>
-                </a:solidFill>
-                <a:latin typeface="Calibri"/>
-              </a:rPr>
-              <a:t>MAPS_TO_TARGET edges, capability specs, modernization backlog</a:t>
-            </a:r>
-          </a:p>
-        </p:txBody>
-      </p:sp>
-      <p:sp>
-        <p:nvSpPr>
-          <p:cNvPr id="27" name="Rectangle 26"/>
-          <p:cNvSpPr/>
-          <p:nvPr/>
-        </p:nvSpPr>
-        <p:spPr>
-          <a:xfrm>
-            <a:off x="9738360" y="5312664"/>
-            <a:ext cx="1691640" cy="384048"/>
-          </a:xfrm>
-          <a:prstGeom prst="rect">
-            <a:avLst/>
-          </a:prstGeom>
-          <a:solidFill>
-            <a:srgbClr val="8A97A3"/>
-          </a:solidFill>
-          <a:ln>
-            <a:noFill/>
-          </a:ln>
-          <a:effectLst/>
-        </p:spPr>
-        <p:style>
-          <a:lnRef idx="1">
-            <a:schemeClr val="accent1"/>
-          </a:lnRef>
-          <a:fillRef idx="3">
-            <a:schemeClr val="accent1"/>
-          </a:fillRef>
-          <a:effectRef idx="2">
-            <a:schemeClr val="accent1"/>
-          </a:effectRef>
-          <a:fontRef idx="minor">
-            <a:schemeClr val="lt1"/>
-          </a:fontRef>
-        </p:style>
-        <p:txBody>
-          <a:bodyPr rtlCol="0" anchor="ctr" wrap="square"/>
-          <a:lstStyle/>
-          <a:p>
-            <a:pPr algn="ctr"/>
-            <a:r>
-              <a:rPr sz="1200" b="1" i="0">
-                <a:solidFill>
-                  <a:srgbClr val="FFFFFF"/>
-                </a:solidFill>
-                <a:latin typeface="Calibri"/>
-              </a:rPr>
-              <a:t>Planned</a:t>
+              <a:rPr sz="1500" b="1" i="0">
+                <a:solidFill>
+                  <a:srgbClr val="149EC8"/>
+                </a:solidFill>
+                <a:latin typeface="Calibri"/>
+              </a:rPr>
+              <a:t>▸  </a:t>
+            </a:r>
+            <a:r>
+              <a:rPr sz="1500" b="1" i="0">
+                <a:solidFill>
+                  <a:srgbClr val="2E8B57"/>
+                </a:solidFill>
+                <a:latin typeface="Calibri"/>
+              </a:rPr>
+              <a:t>De-risks the TCS engagement: the hard parts (schema, clustering, evidence, specs) are proven on open code first.</a:t>
             </a:r>
           </a:p>
         </p:txBody>
@@ -4698,6 +4569,1268 @@
             <a:avLst/>
           </a:prstGeom>
           <a:solidFill>
+            <a:srgbClr val="F2F5F8"/>
+          </a:solidFill>
+          <a:ln>
+            <a:noFill/>
+          </a:ln>
+          <a:effectLst/>
+        </p:spPr>
+        <p:style>
+          <a:lnRef idx="1">
+            <a:schemeClr val="accent1"/>
+          </a:lnRef>
+          <a:fillRef idx="3">
+            <a:schemeClr val="accent1"/>
+          </a:fillRef>
+          <a:effectRef idx="2">
+            <a:schemeClr val="accent1"/>
+          </a:effectRef>
+          <a:fontRef idx="minor">
+            <a:schemeClr val="lt1"/>
+          </a:fontRef>
+        </p:style>
+        <p:txBody>
+          <a:bodyPr rtlCol="0" anchor="ctr"/>
+          <a:lstStyle/>
+          <a:p>
+            <a:pPr algn="ctr"/>
+          </a:p>
+        </p:txBody>
+      </p:sp>
+      <p:sp>
+        <p:nvSpPr>
+          <p:cNvPr id="3" name="Rectangle 2"/>
+          <p:cNvSpPr/>
+          <p:nvPr/>
+        </p:nvSpPr>
+        <p:spPr>
+          <a:xfrm>
+            <a:off x="0" y="0"/>
+            <a:ext cx="12191695" cy="1143000"/>
+          </a:xfrm>
+          <a:prstGeom prst="rect">
+            <a:avLst/>
+          </a:prstGeom>
+          <a:solidFill>
+            <a:srgbClr val="FFFFFF"/>
+          </a:solidFill>
+          <a:ln>
+            <a:noFill/>
+          </a:ln>
+          <a:effectLst/>
+        </p:spPr>
+        <p:style>
+          <a:lnRef idx="1">
+            <a:schemeClr val="accent1"/>
+          </a:lnRef>
+          <a:fillRef idx="3">
+            <a:schemeClr val="accent1"/>
+          </a:fillRef>
+          <a:effectRef idx="2">
+            <a:schemeClr val="accent1"/>
+          </a:effectRef>
+          <a:fontRef idx="minor">
+            <a:schemeClr val="lt1"/>
+          </a:fontRef>
+        </p:style>
+        <p:txBody>
+          <a:bodyPr rtlCol="0" anchor="ctr"/>
+          <a:lstStyle/>
+          <a:p>
+            <a:pPr algn="ctr"/>
+          </a:p>
+        </p:txBody>
+      </p:sp>
+      <p:sp>
+        <p:nvSpPr>
+          <p:cNvPr id="4" name="Rectangle 3"/>
+          <p:cNvSpPr/>
+          <p:nvPr/>
+        </p:nvSpPr>
+        <p:spPr>
+          <a:xfrm>
+            <a:off x="0" y="1078992"/>
+            <a:ext cx="12191695" cy="38100"/>
+          </a:xfrm>
+          <a:prstGeom prst="rect">
+            <a:avLst/>
+          </a:prstGeom>
+          <a:solidFill>
+            <a:srgbClr val="149EC8"/>
+          </a:solidFill>
+          <a:ln>
+            <a:noFill/>
+          </a:ln>
+          <a:effectLst/>
+        </p:spPr>
+        <p:style>
+          <a:lnRef idx="1">
+            <a:schemeClr val="accent1"/>
+          </a:lnRef>
+          <a:fillRef idx="3">
+            <a:schemeClr val="accent1"/>
+          </a:fillRef>
+          <a:effectRef idx="2">
+            <a:schemeClr val="accent1"/>
+          </a:effectRef>
+          <a:fontRef idx="minor">
+            <a:schemeClr val="lt1"/>
+          </a:fontRef>
+        </p:style>
+        <p:txBody>
+          <a:bodyPr rtlCol="0" anchor="ctr"/>
+          <a:lstStyle/>
+          <a:p>
+            <a:pPr algn="ctr"/>
+          </a:p>
+        </p:txBody>
+      </p:sp>
+      <p:sp>
+        <p:nvSpPr>
+          <p:cNvPr id="5" name="Rectangle 4"/>
+          <p:cNvSpPr/>
+          <p:nvPr/>
+        </p:nvSpPr>
+        <p:spPr>
+          <a:xfrm>
+            <a:off x="0" y="0"/>
+            <a:ext cx="127000" cy="1143000"/>
+          </a:xfrm>
+          <a:prstGeom prst="rect">
+            <a:avLst/>
+          </a:prstGeom>
+          <a:solidFill>
+            <a:srgbClr val="149EC8"/>
+          </a:solidFill>
+          <a:ln>
+            <a:noFill/>
+          </a:ln>
+          <a:effectLst/>
+        </p:spPr>
+        <p:style>
+          <a:lnRef idx="1">
+            <a:schemeClr val="accent1"/>
+          </a:lnRef>
+          <a:fillRef idx="3">
+            <a:schemeClr val="accent1"/>
+          </a:fillRef>
+          <a:effectRef idx="2">
+            <a:schemeClr val="accent1"/>
+          </a:effectRef>
+          <a:fontRef idx="minor">
+            <a:schemeClr val="lt1"/>
+          </a:fontRef>
+        </p:style>
+        <p:txBody>
+          <a:bodyPr rtlCol="0" anchor="ctr"/>
+          <a:lstStyle/>
+          <a:p>
+            <a:pPr algn="ctr"/>
+          </a:p>
+        </p:txBody>
+      </p:sp>
+      <p:sp>
+        <p:nvSpPr>
+          <p:cNvPr id="6" name="TextBox 5"/>
+          <p:cNvSpPr txBox="1"/>
+          <p:nvPr/>
+        </p:nvSpPr>
+        <p:spPr>
+          <a:xfrm>
+            <a:off x="502920" y="164592"/>
+            <a:ext cx="10972800" cy="365760"/>
+          </a:xfrm>
+          <a:prstGeom prst="rect">
+            <a:avLst/>
+          </a:prstGeom>
+          <a:noFill/>
+        </p:spPr>
+        <p:txBody>
+          <a:bodyPr wrap="square" anchor="t">
+            <a:spAutoFit/>
+          </a:bodyPr>
+          <a:lstStyle/>
+          <a:p>
+            <a:pPr algn="l">
+              <a:lnSpc>
+                <a:spcPct val="100000"/>
+              </a:lnSpc>
+              <a:spcAft>
+                <a:spcPts val="600"/>
+              </a:spcAft>
+            </a:pPr>
+            <a:r>
+              <a:rPr sz="1200" b="1" i="0">
+                <a:solidFill>
+                  <a:srgbClr val="149EC8"/>
+                </a:solidFill>
+                <a:latin typeface="Calibri"/>
+              </a:rPr>
+              <a:t>ROADMAP</a:t>
+            </a:r>
+          </a:p>
+        </p:txBody>
+      </p:sp>
+      <p:sp>
+        <p:nvSpPr>
+          <p:cNvPr id="7" name="TextBox 6"/>
+          <p:cNvSpPr txBox="1"/>
+          <p:nvPr/>
+        </p:nvSpPr>
+        <p:spPr>
+          <a:xfrm>
+            <a:off x="457200" y="438912"/>
+            <a:ext cx="11338560" cy="640080"/>
+          </a:xfrm>
+          <a:prstGeom prst="rect">
+            <a:avLst/>
+          </a:prstGeom>
+          <a:noFill/>
+        </p:spPr>
+        <p:txBody>
+          <a:bodyPr wrap="square" anchor="t">
+            <a:spAutoFit/>
+          </a:bodyPr>
+          <a:lstStyle/>
+          <a:p>
+            <a:pPr algn="l">
+              <a:lnSpc>
+                <a:spcPct val="100000"/>
+              </a:lnSpc>
+              <a:spcAft>
+                <a:spcPts val="600"/>
+              </a:spcAft>
+            </a:pPr>
+            <a:r>
+              <a:rPr sz="2600" b="1" i="0">
+                <a:solidFill>
+                  <a:srgbClr val="0B2447"/>
+                </a:solidFill>
+                <a:latin typeface="Calibri"/>
+              </a:rPr>
+              <a:t>Where we are and what's next</a:t>
+            </a:r>
+          </a:p>
+        </p:txBody>
+      </p:sp>
+      <p:sp>
+        <p:nvSpPr>
+          <p:cNvPr id="8" name="Rectangle 7"/>
+          <p:cNvSpPr/>
+          <p:nvPr/>
+        </p:nvSpPr>
+        <p:spPr>
+          <a:xfrm>
+            <a:off x="548640" y="1508760"/>
+            <a:ext cx="11064240" cy="1078992"/>
+          </a:xfrm>
+          <a:prstGeom prst="rect">
+            <a:avLst/>
+          </a:prstGeom>
+          <a:solidFill>
+            <a:srgbClr val="FFFFFF"/>
+          </a:solidFill>
+          <a:ln w="12700">
+            <a:solidFill>
+              <a:srgbClr val="D5DDE3"/>
+            </a:solidFill>
+          </a:ln>
+          <a:effectLst/>
+        </p:spPr>
+        <p:style>
+          <a:lnRef idx="1">
+            <a:schemeClr val="accent1"/>
+          </a:lnRef>
+          <a:fillRef idx="3">
+            <a:schemeClr val="accent1"/>
+          </a:fillRef>
+          <a:effectRef idx="2">
+            <a:schemeClr val="accent1"/>
+          </a:effectRef>
+          <a:fontRef idx="minor">
+            <a:schemeClr val="lt1"/>
+          </a:fontRef>
+        </p:style>
+        <p:txBody>
+          <a:bodyPr rtlCol="0" anchor="ctr"/>
+          <a:lstStyle/>
+          <a:p>
+            <a:pPr algn="ctr"/>
+          </a:p>
+        </p:txBody>
+      </p:sp>
+      <p:sp>
+        <p:nvSpPr>
+          <p:cNvPr id="9" name="Rectangle 8"/>
+          <p:cNvSpPr/>
+          <p:nvPr/>
+        </p:nvSpPr>
+        <p:spPr>
+          <a:xfrm>
+            <a:off x="548640" y="1508760"/>
+            <a:ext cx="914400" cy="1078992"/>
+          </a:xfrm>
+          <a:prstGeom prst="rect">
+            <a:avLst/>
+          </a:prstGeom>
+          <a:solidFill>
+            <a:srgbClr val="0B2447"/>
+          </a:solidFill>
+          <a:ln>
+            <a:noFill/>
+          </a:ln>
+          <a:effectLst/>
+        </p:spPr>
+        <p:style>
+          <a:lnRef idx="1">
+            <a:schemeClr val="accent1"/>
+          </a:lnRef>
+          <a:fillRef idx="3">
+            <a:schemeClr val="accent1"/>
+          </a:fillRef>
+          <a:effectRef idx="2">
+            <a:schemeClr val="accent1"/>
+          </a:effectRef>
+          <a:fontRef idx="minor">
+            <a:schemeClr val="lt1"/>
+          </a:fontRef>
+        </p:style>
+        <p:txBody>
+          <a:bodyPr rtlCol="0" anchor="ctr"/>
+          <a:lstStyle/>
+          <a:p>
+            <a:pPr algn="ctr"/>
+          </a:p>
+        </p:txBody>
+      </p:sp>
+      <p:sp>
+        <p:nvSpPr>
+          <p:cNvPr id="10" name="TextBox 9"/>
+          <p:cNvSpPr txBox="1"/>
+          <p:nvPr/>
+        </p:nvSpPr>
+        <p:spPr>
+          <a:xfrm>
+            <a:off x="548640" y="1801368"/>
+            <a:ext cx="914400" cy="548640"/>
+          </a:xfrm>
+          <a:prstGeom prst="rect">
+            <a:avLst/>
+          </a:prstGeom>
+          <a:noFill/>
+        </p:spPr>
+        <p:txBody>
+          <a:bodyPr wrap="square" anchor="t">
+            <a:spAutoFit/>
+          </a:bodyPr>
+          <a:lstStyle/>
+          <a:p>
+            <a:pPr algn="ctr">
+              <a:lnSpc>
+                <a:spcPct val="100000"/>
+              </a:lnSpc>
+              <a:spcAft>
+                <a:spcPts val="600"/>
+              </a:spcAft>
+            </a:pPr>
+            <a:r>
+              <a:rPr sz="2600" b="1" i="0">
+                <a:solidFill>
+                  <a:srgbClr val="FFFFFF"/>
+                </a:solidFill>
+                <a:latin typeface="Calibri"/>
+              </a:rPr>
+              <a:t>0</a:t>
+            </a:r>
+          </a:p>
+        </p:txBody>
+      </p:sp>
+      <p:sp>
+        <p:nvSpPr>
+          <p:cNvPr id="11" name="TextBox 10"/>
+          <p:cNvSpPr txBox="1"/>
+          <p:nvPr/>
+        </p:nvSpPr>
+        <p:spPr>
+          <a:xfrm>
+            <a:off x="1645920" y="1655064"/>
+            <a:ext cx="6949440" cy="822960"/>
+          </a:xfrm>
+          <a:prstGeom prst="rect">
+            <a:avLst/>
+          </a:prstGeom>
+          <a:noFill/>
+        </p:spPr>
+        <p:txBody>
+          <a:bodyPr wrap="square" anchor="t">
+            <a:spAutoFit/>
+          </a:bodyPr>
+          <a:lstStyle/>
+          <a:p>
+            <a:pPr algn="l">
+              <a:lnSpc>
+                <a:spcPct val="100000"/>
+              </a:lnSpc>
+              <a:spcAft>
+                <a:spcPts val="300"/>
+              </a:spcAft>
+            </a:pPr>
+            <a:r>
+              <a:rPr sz="1700" b="1" i="0">
+                <a:solidFill>
+                  <a:srgbClr val="0B2447"/>
+                </a:solidFill>
+                <a:latin typeface="Calibri"/>
+              </a:rPr>
+              <a:t>Schema alignment</a:t>
+            </a:r>
+          </a:p>
+          <a:p>
+            <a:pPr algn="l">
+              <a:lnSpc>
+                <a:spcPct val="100000"/>
+              </a:lnSpc>
+              <a:spcAft>
+                <a:spcPts val="300"/>
+              </a:spcAft>
+            </a:pPr>
+            <a:r>
+              <a:rPr sz="1300" b="0" i="0">
+                <a:solidFill>
+                  <a:srgbClr val="3A4A5A"/>
+                </a:solidFill>
+                <a:latin typeface="Calibri"/>
+              </a:rPr>
+              <a:t>Confirm MasterCraft export maps onto KDM-lite nodes/edges</a:t>
+            </a:r>
+          </a:p>
+        </p:txBody>
+      </p:sp>
+      <p:sp>
+        <p:nvSpPr>
+          <p:cNvPr id="12" name="Rectangle 11"/>
+          <p:cNvSpPr/>
+          <p:nvPr/>
+        </p:nvSpPr>
+        <p:spPr>
+          <a:xfrm>
+            <a:off x="9738360" y="1856232"/>
+            <a:ext cx="1691640" cy="384048"/>
+          </a:xfrm>
+          <a:prstGeom prst="rect">
+            <a:avLst/>
+          </a:prstGeom>
+          <a:solidFill>
+            <a:srgbClr val="149EC8"/>
+          </a:solidFill>
+          <a:ln>
+            <a:noFill/>
+          </a:ln>
+          <a:effectLst/>
+        </p:spPr>
+        <p:style>
+          <a:lnRef idx="1">
+            <a:schemeClr val="accent1"/>
+          </a:lnRef>
+          <a:fillRef idx="3">
+            <a:schemeClr val="accent1"/>
+          </a:fillRef>
+          <a:effectRef idx="2">
+            <a:schemeClr val="accent1"/>
+          </a:effectRef>
+          <a:fontRef idx="minor">
+            <a:schemeClr val="lt1"/>
+          </a:fontRef>
+        </p:style>
+        <p:txBody>
+          <a:bodyPr rtlCol="0" anchor="ctr" wrap="square"/>
+          <a:lstStyle/>
+          <a:p>
+            <a:pPr algn="ctr"/>
+            <a:r>
+              <a:rPr sz="1200" b="1" i="0">
+                <a:solidFill>
+                  <a:srgbClr val="FFFFFF"/>
+                </a:solidFill>
+                <a:latin typeface="Calibri"/>
+              </a:rPr>
+              <a:t>Ready</a:t>
+            </a:r>
+          </a:p>
+        </p:txBody>
+      </p:sp>
+      <p:sp>
+        <p:nvSpPr>
+          <p:cNvPr id="13" name="Rectangle 12"/>
+          <p:cNvSpPr/>
+          <p:nvPr/>
+        </p:nvSpPr>
+        <p:spPr>
+          <a:xfrm>
+            <a:off x="548640" y="2660904"/>
+            <a:ext cx="11064240" cy="1078992"/>
+          </a:xfrm>
+          <a:prstGeom prst="rect">
+            <a:avLst/>
+          </a:prstGeom>
+          <a:solidFill>
+            <a:srgbClr val="FFFFFF"/>
+          </a:solidFill>
+          <a:ln w="12700">
+            <a:solidFill>
+              <a:srgbClr val="D5DDE3"/>
+            </a:solidFill>
+          </a:ln>
+          <a:effectLst/>
+        </p:spPr>
+        <p:style>
+          <a:lnRef idx="1">
+            <a:schemeClr val="accent1"/>
+          </a:lnRef>
+          <a:fillRef idx="3">
+            <a:schemeClr val="accent1"/>
+          </a:fillRef>
+          <a:effectRef idx="2">
+            <a:schemeClr val="accent1"/>
+          </a:effectRef>
+          <a:fontRef idx="minor">
+            <a:schemeClr val="lt1"/>
+          </a:fontRef>
+        </p:style>
+        <p:txBody>
+          <a:bodyPr rtlCol="0" anchor="ctr"/>
+          <a:lstStyle/>
+          <a:p>
+            <a:pPr algn="ctr"/>
+          </a:p>
+        </p:txBody>
+      </p:sp>
+      <p:sp>
+        <p:nvSpPr>
+          <p:cNvPr id="14" name="Rectangle 13"/>
+          <p:cNvSpPr/>
+          <p:nvPr/>
+        </p:nvSpPr>
+        <p:spPr>
+          <a:xfrm>
+            <a:off x="548640" y="2660904"/>
+            <a:ext cx="914400" cy="1078992"/>
+          </a:xfrm>
+          <a:prstGeom prst="rect">
+            <a:avLst/>
+          </a:prstGeom>
+          <a:solidFill>
+            <a:srgbClr val="0B2447"/>
+          </a:solidFill>
+          <a:ln>
+            <a:noFill/>
+          </a:ln>
+          <a:effectLst/>
+        </p:spPr>
+        <p:style>
+          <a:lnRef idx="1">
+            <a:schemeClr val="accent1"/>
+          </a:lnRef>
+          <a:fillRef idx="3">
+            <a:schemeClr val="accent1"/>
+          </a:fillRef>
+          <a:effectRef idx="2">
+            <a:schemeClr val="accent1"/>
+          </a:effectRef>
+          <a:fontRef idx="minor">
+            <a:schemeClr val="lt1"/>
+          </a:fontRef>
+        </p:style>
+        <p:txBody>
+          <a:bodyPr rtlCol="0" anchor="ctr"/>
+          <a:lstStyle/>
+          <a:p>
+            <a:pPr algn="ctr"/>
+          </a:p>
+        </p:txBody>
+      </p:sp>
+      <p:sp>
+        <p:nvSpPr>
+          <p:cNvPr id="15" name="TextBox 14"/>
+          <p:cNvSpPr txBox="1"/>
+          <p:nvPr/>
+        </p:nvSpPr>
+        <p:spPr>
+          <a:xfrm>
+            <a:off x="548640" y="2953512"/>
+            <a:ext cx="914400" cy="548640"/>
+          </a:xfrm>
+          <a:prstGeom prst="rect">
+            <a:avLst/>
+          </a:prstGeom>
+          <a:noFill/>
+        </p:spPr>
+        <p:txBody>
+          <a:bodyPr wrap="square" anchor="t">
+            <a:spAutoFit/>
+          </a:bodyPr>
+          <a:lstStyle/>
+          <a:p>
+            <a:pPr algn="ctr">
+              <a:lnSpc>
+                <a:spcPct val="100000"/>
+              </a:lnSpc>
+              <a:spcAft>
+                <a:spcPts val="600"/>
+              </a:spcAft>
+            </a:pPr>
+            <a:r>
+              <a:rPr sz="2600" b="1" i="0">
+                <a:solidFill>
+                  <a:srgbClr val="FFFFFF"/>
+                </a:solidFill>
+                <a:latin typeface="Calibri"/>
+              </a:rPr>
+              <a:t>1</a:t>
+            </a:r>
+          </a:p>
+        </p:txBody>
+      </p:sp>
+      <p:sp>
+        <p:nvSpPr>
+          <p:cNvPr id="16" name="TextBox 15"/>
+          <p:cNvSpPr txBox="1"/>
+          <p:nvPr/>
+        </p:nvSpPr>
+        <p:spPr>
+          <a:xfrm>
+            <a:off x="1645920" y="2807208"/>
+            <a:ext cx="6949440" cy="822960"/>
+          </a:xfrm>
+          <a:prstGeom prst="rect">
+            <a:avLst/>
+          </a:prstGeom>
+          <a:noFill/>
+        </p:spPr>
+        <p:txBody>
+          <a:bodyPr wrap="square" anchor="t">
+            <a:spAutoFit/>
+          </a:bodyPr>
+          <a:lstStyle/>
+          <a:p>
+            <a:pPr algn="l">
+              <a:lnSpc>
+                <a:spcPct val="100000"/>
+              </a:lnSpc>
+              <a:spcAft>
+                <a:spcPts val="300"/>
+              </a:spcAft>
+            </a:pPr>
+            <a:r>
+              <a:rPr sz="1700" b="1" i="0">
+                <a:solidFill>
+                  <a:srgbClr val="0B2447"/>
+                </a:solidFill>
+                <a:latin typeface="Calibri"/>
+              </a:rPr>
+              <a:t>This sandbox</a:t>
+            </a:r>
+          </a:p>
+          <a:p>
+            <a:pPr algn="l">
+              <a:lnSpc>
+                <a:spcPct val="100000"/>
+              </a:lnSpc>
+              <a:spcAft>
+                <a:spcPts val="300"/>
+              </a:spcAft>
+            </a:pPr>
+            <a:r>
+              <a:rPr sz="1300" b="0" i="0">
+                <a:solidFill>
+                  <a:srgbClr val="3A4A5A"/>
+                </a:solidFill>
+                <a:latin typeface="Calibri"/>
+              </a:rPr>
+              <a:t>Prove extract → graph → cluster → spec on open COBOL</a:t>
+            </a:r>
+          </a:p>
+        </p:txBody>
+      </p:sp>
+      <p:sp>
+        <p:nvSpPr>
+          <p:cNvPr id="17" name="Rectangle 16"/>
+          <p:cNvSpPr/>
+          <p:nvPr/>
+        </p:nvSpPr>
+        <p:spPr>
+          <a:xfrm>
+            <a:off x="9738360" y="3008376"/>
+            <a:ext cx="1691640" cy="384048"/>
+          </a:xfrm>
+          <a:prstGeom prst="rect">
+            <a:avLst/>
+          </a:prstGeom>
+          <a:solidFill>
+            <a:srgbClr val="2E8B57"/>
+          </a:solidFill>
+          <a:ln>
+            <a:noFill/>
+          </a:ln>
+          <a:effectLst/>
+        </p:spPr>
+        <p:style>
+          <a:lnRef idx="1">
+            <a:schemeClr val="accent1"/>
+          </a:lnRef>
+          <a:fillRef idx="3">
+            <a:schemeClr val="accent1"/>
+          </a:fillRef>
+          <a:effectRef idx="2">
+            <a:schemeClr val="accent1"/>
+          </a:effectRef>
+          <a:fontRef idx="minor">
+            <a:schemeClr val="lt1"/>
+          </a:fontRef>
+        </p:style>
+        <p:txBody>
+          <a:bodyPr rtlCol="0" anchor="ctr" wrap="square"/>
+          <a:lstStyle/>
+          <a:p>
+            <a:pPr algn="ctr"/>
+            <a:r>
+              <a:rPr sz="1200" b="1" i="0">
+                <a:solidFill>
+                  <a:srgbClr val="FFFFFF"/>
+                </a:solidFill>
+                <a:latin typeface="Calibri"/>
+              </a:rPr>
+              <a:t>Done</a:t>
+            </a:r>
+          </a:p>
+        </p:txBody>
+      </p:sp>
+      <p:sp>
+        <p:nvSpPr>
+          <p:cNvPr id="18" name="Rectangle 17"/>
+          <p:cNvSpPr/>
+          <p:nvPr/>
+        </p:nvSpPr>
+        <p:spPr>
+          <a:xfrm>
+            <a:off x="548640" y="3813048"/>
+            <a:ext cx="11064240" cy="1078992"/>
+          </a:xfrm>
+          <a:prstGeom prst="rect">
+            <a:avLst/>
+          </a:prstGeom>
+          <a:solidFill>
+            <a:srgbClr val="FFFFFF"/>
+          </a:solidFill>
+          <a:ln w="12700">
+            <a:solidFill>
+              <a:srgbClr val="D5DDE3"/>
+            </a:solidFill>
+          </a:ln>
+          <a:effectLst/>
+        </p:spPr>
+        <p:style>
+          <a:lnRef idx="1">
+            <a:schemeClr val="accent1"/>
+          </a:lnRef>
+          <a:fillRef idx="3">
+            <a:schemeClr val="accent1"/>
+          </a:fillRef>
+          <a:effectRef idx="2">
+            <a:schemeClr val="accent1"/>
+          </a:effectRef>
+          <a:fontRef idx="minor">
+            <a:schemeClr val="lt1"/>
+          </a:fontRef>
+        </p:style>
+        <p:txBody>
+          <a:bodyPr rtlCol="0" anchor="ctr"/>
+          <a:lstStyle/>
+          <a:p>
+            <a:pPr algn="ctr"/>
+          </a:p>
+        </p:txBody>
+      </p:sp>
+      <p:sp>
+        <p:nvSpPr>
+          <p:cNvPr id="19" name="Rectangle 18"/>
+          <p:cNvSpPr/>
+          <p:nvPr/>
+        </p:nvSpPr>
+        <p:spPr>
+          <a:xfrm>
+            <a:off x="548640" y="3813048"/>
+            <a:ext cx="914400" cy="1078992"/>
+          </a:xfrm>
+          <a:prstGeom prst="rect">
+            <a:avLst/>
+          </a:prstGeom>
+          <a:solidFill>
+            <a:srgbClr val="0B2447"/>
+          </a:solidFill>
+          <a:ln>
+            <a:noFill/>
+          </a:ln>
+          <a:effectLst/>
+        </p:spPr>
+        <p:style>
+          <a:lnRef idx="1">
+            <a:schemeClr val="accent1"/>
+          </a:lnRef>
+          <a:fillRef idx="3">
+            <a:schemeClr val="accent1"/>
+          </a:fillRef>
+          <a:effectRef idx="2">
+            <a:schemeClr val="accent1"/>
+          </a:effectRef>
+          <a:fontRef idx="minor">
+            <a:schemeClr val="lt1"/>
+          </a:fontRef>
+        </p:style>
+        <p:txBody>
+          <a:bodyPr rtlCol="0" anchor="ctr"/>
+          <a:lstStyle/>
+          <a:p>
+            <a:pPr algn="ctr"/>
+          </a:p>
+        </p:txBody>
+      </p:sp>
+      <p:sp>
+        <p:nvSpPr>
+          <p:cNvPr id="20" name="TextBox 19"/>
+          <p:cNvSpPr txBox="1"/>
+          <p:nvPr/>
+        </p:nvSpPr>
+        <p:spPr>
+          <a:xfrm>
+            <a:off x="548640" y="4105656"/>
+            <a:ext cx="914400" cy="548640"/>
+          </a:xfrm>
+          <a:prstGeom prst="rect">
+            <a:avLst/>
+          </a:prstGeom>
+          <a:noFill/>
+        </p:spPr>
+        <p:txBody>
+          <a:bodyPr wrap="square" anchor="t">
+            <a:spAutoFit/>
+          </a:bodyPr>
+          <a:lstStyle/>
+          <a:p>
+            <a:pPr algn="ctr">
+              <a:lnSpc>
+                <a:spcPct val="100000"/>
+              </a:lnSpc>
+              <a:spcAft>
+                <a:spcPts val="600"/>
+              </a:spcAft>
+            </a:pPr>
+            <a:r>
+              <a:rPr sz="2600" b="1" i="0">
+                <a:solidFill>
+                  <a:srgbClr val="FFFFFF"/>
+                </a:solidFill>
+                <a:latin typeface="Calibri"/>
+              </a:rPr>
+              <a:t>2</a:t>
+            </a:r>
+          </a:p>
+        </p:txBody>
+      </p:sp>
+      <p:sp>
+        <p:nvSpPr>
+          <p:cNvPr id="21" name="TextBox 20"/>
+          <p:cNvSpPr txBox="1"/>
+          <p:nvPr/>
+        </p:nvSpPr>
+        <p:spPr>
+          <a:xfrm>
+            <a:off x="1645920" y="3959352"/>
+            <a:ext cx="6949440" cy="822960"/>
+          </a:xfrm>
+          <a:prstGeom prst="rect">
+            <a:avLst/>
+          </a:prstGeom>
+          <a:noFill/>
+        </p:spPr>
+        <p:txBody>
+          <a:bodyPr wrap="square" anchor="t">
+            <a:spAutoFit/>
+          </a:bodyPr>
+          <a:lstStyle/>
+          <a:p>
+            <a:pPr algn="l">
+              <a:lnSpc>
+                <a:spcPct val="100000"/>
+              </a:lnSpc>
+              <a:spcAft>
+                <a:spcPts val="300"/>
+              </a:spcAft>
+            </a:pPr>
+            <a:r>
+              <a:rPr sz="1700" b="1" i="0">
+                <a:solidFill>
+                  <a:srgbClr val="0B2447"/>
+                </a:solidFill>
+                <a:latin typeface="Calibri"/>
+              </a:rPr>
+              <a:t>GraphRAG enrichment</a:t>
+            </a:r>
+          </a:p>
+          <a:p>
+            <a:pPr algn="l">
+              <a:lnSpc>
+                <a:spcPct val="100000"/>
+              </a:lnSpc>
+              <a:spcAft>
+                <a:spcPts val="300"/>
+              </a:spcAft>
+            </a:pPr>
+            <a:r>
+              <a:rPr sz="1300" b="0" i="0">
+                <a:solidFill>
+                  <a:srgbClr val="3A4A5A"/>
+                </a:solidFill>
+                <a:latin typeface="Calibri"/>
+              </a:rPr>
+              <a:t>Semantic retrieval + richer narratives; broaden coverage</a:t>
+            </a:r>
+          </a:p>
+        </p:txBody>
+      </p:sp>
+      <p:sp>
+        <p:nvSpPr>
+          <p:cNvPr id="22" name="Rectangle 21"/>
+          <p:cNvSpPr/>
+          <p:nvPr/>
+        </p:nvSpPr>
+        <p:spPr>
+          <a:xfrm>
+            <a:off x="9738360" y="4160520"/>
+            <a:ext cx="1691640" cy="384048"/>
+          </a:xfrm>
+          <a:prstGeom prst="rect">
+            <a:avLst/>
+          </a:prstGeom>
+          <a:solidFill>
+            <a:srgbClr val="E89B1D"/>
+          </a:solidFill>
+          <a:ln>
+            <a:noFill/>
+          </a:ln>
+          <a:effectLst/>
+        </p:spPr>
+        <p:style>
+          <a:lnRef idx="1">
+            <a:schemeClr val="accent1"/>
+          </a:lnRef>
+          <a:fillRef idx="3">
+            <a:schemeClr val="accent1"/>
+          </a:fillRef>
+          <a:effectRef idx="2">
+            <a:schemeClr val="accent1"/>
+          </a:effectRef>
+          <a:fontRef idx="minor">
+            <a:schemeClr val="lt1"/>
+          </a:fontRef>
+        </p:style>
+        <p:txBody>
+          <a:bodyPr rtlCol="0" anchor="ctr" wrap="square"/>
+          <a:lstStyle/>
+          <a:p>
+            <a:pPr algn="ctr"/>
+            <a:r>
+              <a:rPr sz="1200" b="1" i="0">
+                <a:solidFill>
+                  <a:srgbClr val="FFFFFF"/>
+                </a:solidFill>
+                <a:latin typeface="Calibri"/>
+              </a:rPr>
+              <a:t>In progress</a:t>
+            </a:r>
+          </a:p>
+        </p:txBody>
+      </p:sp>
+      <p:sp>
+        <p:nvSpPr>
+          <p:cNvPr id="23" name="Rectangle 22"/>
+          <p:cNvSpPr/>
+          <p:nvPr/>
+        </p:nvSpPr>
+        <p:spPr>
+          <a:xfrm>
+            <a:off x="548640" y="4965192"/>
+            <a:ext cx="11064240" cy="1078992"/>
+          </a:xfrm>
+          <a:prstGeom prst="rect">
+            <a:avLst/>
+          </a:prstGeom>
+          <a:solidFill>
+            <a:srgbClr val="FFFFFF"/>
+          </a:solidFill>
+          <a:ln w="12700">
+            <a:solidFill>
+              <a:srgbClr val="D5DDE3"/>
+            </a:solidFill>
+          </a:ln>
+          <a:effectLst/>
+        </p:spPr>
+        <p:style>
+          <a:lnRef idx="1">
+            <a:schemeClr val="accent1"/>
+          </a:lnRef>
+          <a:fillRef idx="3">
+            <a:schemeClr val="accent1"/>
+          </a:fillRef>
+          <a:effectRef idx="2">
+            <a:schemeClr val="accent1"/>
+          </a:effectRef>
+          <a:fontRef idx="minor">
+            <a:schemeClr val="lt1"/>
+          </a:fontRef>
+        </p:style>
+        <p:txBody>
+          <a:bodyPr rtlCol="0" anchor="ctr"/>
+          <a:lstStyle/>
+          <a:p>
+            <a:pPr algn="ctr"/>
+          </a:p>
+        </p:txBody>
+      </p:sp>
+      <p:sp>
+        <p:nvSpPr>
+          <p:cNvPr id="24" name="Rectangle 23"/>
+          <p:cNvSpPr/>
+          <p:nvPr/>
+        </p:nvSpPr>
+        <p:spPr>
+          <a:xfrm>
+            <a:off x="548640" y="4965192"/>
+            <a:ext cx="914400" cy="1078992"/>
+          </a:xfrm>
+          <a:prstGeom prst="rect">
+            <a:avLst/>
+          </a:prstGeom>
+          <a:solidFill>
+            <a:srgbClr val="0B2447"/>
+          </a:solidFill>
+          <a:ln>
+            <a:noFill/>
+          </a:ln>
+          <a:effectLst/>
+        </p:spPr>
+        <p:style>
+          <a:lnRef idx="1">
+            <a:schemeClr val="accent1"/>
+          </a:lnRef>
+          <a:fillRef idx="3">
+            <a:schemeClr val="accent1"/>
+          </a:fillRef>
+          <a:effectRef idx="2">
+            <a:schemeClr val="accent1"/>
+          </a:effectRef>
+          <a:fontRef idx="minor">
+            <a:schemeClr val="lt1"/>
+          </a:fontRef>
+        </p:style>
+        <p:txBody>
+          <a:bodyPr rtlCol="0" anchor="ctr"/>
+          <a:lstStyle/>
+          <a:p>
+            <a:pPr algn="ctr"/>
+          </a:p>
+        </p:txBody>
+      </p:sp>
+      <p:sp>
+        <p:nvSpPr>
+          <p:cNvPr id="25" name="TextBox 24"/>
+          <p:cNvSpPr txBox="1"/>
+          <p:nvPr/>
+        </p:nvSpPr>
+        <p:spPr>
+          <a:xfrm>
+            <a:off x="548640" y="5257800"/>
+            <a:ext cx="914400" cy="548640"/>
+          </a:xfrm>
+          <a:prstGeom prst="rect">
+            <a:avLst/>
+          </a:prstGeom>
+          <a:noFill/>
+        </p:spPr>
+        <p:txBody>
+          <a:bodyPr wrap="square" anchor="t">
+            <a:spAutoFit/>
+          </a:bodyPr>
+          <a:lstStyle/>
+          <a:p>
+            <a:pPr algn="ctr">
+              <a:lnSpc>
+                <a:spcPct val="100000"/>
+              </a:lnSpc>
+              <a:spcAft>
+                <a:spcPts val="600"/>
+              </a:spcAft>
+            </a:pPr>
+            <a:r>
+              <a:rPr sz="2600" b="1" i="0">
+                <a:solidFill>
+                  <a:srgbClr val="FFFFFF"/>
+                </a:solidFill>
+                <a:latin typeface="Calibri"/>
+              </a:rPr>
+              <a:t>3</a:t>
+            </a:r>
+          </a:p>
+        </p:txBody>
+      </p:sp>
+      <p:sp>
+        <p:nvSpPr>
+          <p:cNvPr id="26" name="TextBox 25"/>
+          <p:cNvSpPr txBox="1"/>
+          <p:nvPr/>
+        </p:nvSpPr>
+        <p:spPr>
+          <a:xfrm>
+            <a:off x="1645920" y="5111496"/>
+            <a:ext cx="6949440" cy="822960"/>
+          </a:xfrm>
+          <a:prstGeom prst="rect">
+            <a:avLst/>
+          </a:prstGeom>
+          <a:noFill/>
+        </p:spPr>
+        <p:txBody>
+          <a:bodyPr wrap="square" anchor="t">
+            <a:spAutoFit/>
+          </a:bodyPr>
+          <a:lstStyle/>
+          <a:p>
+            <a:pPr algn="l">
+              <a:lnSpc>
+                <a:spcPct val="100000"/>
+              </a:lnSpc>
+              <a:spcAft>
+                <a:spcPts val="300"/>
+              </a:spcAft>
+            </a:pPr>
+            <a:r>
+              <a:rPr sz="1700" b="1" i="0">
+                <a:solidFill>
+                  <a:srgbClr val="0B2447"/>
+                </a:solidFill>
+                <a:latin typeface="Calibri"/>
+              </a:rPr>
+              <a:t>Target mapping</a:t>
+            </a:r>
+          </a:p>
+          <a:p>
+            <a:pPr algn="l">
+              <a:lnSpc>
+                <a:spcPct val="100000"/>
+              </a:lnSpc>
+              <a:spcAft>
+                <a:spcPts val="300"/>
+              </a:spcAft>
+            </a:pPr>
+            <a:r>
+              <a:rPr sz="1300" b="0" i="0">
+                <a:solidFill>
+                  <a:srgbClr val="3A4A5A"/>
+                </a:solidFill>
+                <a:latin typeface="Calibri"/>
+              </a:rPr>
+              <a:t>MAPS_TO_TARGET edges, capability specs, modernization backlog</a:t>
+            </a:r>
+          </a:p>
+        </p:txBody>
+      </p:sp>
+      <p:sp>
+        <p:nvSpPr>
+          <p:cNvPr id="27" name="Rectangle 26"/>
+          <p:cNvSpPr/>
+          <p:nvPr/>
+        </p:nvSpPr>
+        <p:spPr>
+          <a:xfrm>
+            <a:off x="9738360" y="5312664"/>
+            <a:ext cx="1691640" cy="384048"/>
+          </a:xfrm>
+          <a:prstGeom prst="rect">
+            <a:avLst/>
+          </a:prstGeom>
+          <a:solidFill>
+            <a:srgbClr val="8A97A3"/>
+          </a:solidFill>
+          <a:ln>
+            <a:noFill/>
+          </a:ln>
+          <a:effectLst/>
+        </p:spPr>
+        <p:style>
+          <a:lnRef idx="1">
+            <a:schemeClr val="accent1"/>
+          </a:lnRef>
+          <a:fillRef idx="3">
+            <a:schemeClr val="accent1"/>
+          </a:fillRef>
+          <a:effectRef idx="2">
+            <a:schemeClr val="accent1"/>
+          </a:effectRef>
+          <a:fontRef idx="minor">
+            <a:schemeClr val="lt1"/>
+          </a:fontRef>
+        </p:style>
+        <p:txBody>
+          <a:bodyPr rtlCol="0" anchor="ctr" wrap="square"/>
+          <a:lstStyle/>
+          <a:p>
+            <a:pPr algn="ctr"/>
+            <a:r>
+              <a:rPr sz="1200" b="1" i="0">
+                <a:solidFill>
+                  <a:srgbClr val="FFFFFF"/>
+                </a:solidFill>
+                <a:latin typeface="Calibri"/>
+              </a:rPr>
+              <a:t>Planned</a:t>
+            </a:r>
+          </a:p>
+        </p:txBody>
+      </p:sp>
+    </p:spTree>
+  </p:cSld>
+  <p:clrMapOvr>
+    <a:masterClrMapping/>
+  </p:clrMapOvr>
+</p:sld>
+</file>
+
+<file path=ppt/slides/slide12.xml><?xml version="1.0" encoding="utf-8"?>
+<p:sld xmlns:a="http://schemas.openxmlformats.org/drawingml/2006/main" xmlns:p="http://schemas.openxmlformats.org/presentationml/2006/main" xmlns:r="http://schemas.openxmlformats.org/officeDocument/2006/relationships">
+  <p:cSld>
+    <p:spTree>
+      <p:nvGrpSpPr>
+        <p:cNvPr id="1" name=""/>
+        <p:cNvGrpSpPr/>
+        <p:nvPr/>
+      </p:nvGrpSpPr>
+      <p:grpSpPr/>
+      <p:sp>
+        <p:nvSpPr>
+          <p:cNvPr id="2" name="Rectangle 1"/>
+          <p:cNvSpPr/>
+          <p:nvPr/>
+        </p:nvSpPr>
+        <p:spPr>
+          <a:xfrm>
+            <a:off x="0" y="0"/>
+            <a:ext cx="12191695" cy="6858000"/>
+          </a:xfrm>
+          <a:prstGeom prst="rect">
+            <a:avLst/>
+          </a:prstGeom>
+          <a:solidFill>
             <a:srgbClr val="0B2447"/>
           </a:solidFill>
           <a:ln>
@@ -5902,1292 +7035,35 @@
                 </a:solidFill>
                 <a:latin typeface="Calibri"/>
               </a:rPr>
-              <a:t>One pipeline, four stages, evidence end-to-end</a:t>
-            </a:r>
-          </a:p>
-        </p:txBody>
-      </p:sp>
-      <p:sp>
-        <p:nvSpPr>
-          <p:cNvPr id="8" name="Rectangle 7"/>
-          <p:cNvSpPr/>
-          <p:nvPr/>
-        </p:nvSpPr>
-        <p:spPr>
-          <a:xfrm>
-            <a:off x="502920" y="1920240"/>
-            <a:ext cx="2084831" cy="1554480"/>
-          </a:xfrm>
-          <a:prstGeom prst="rect">
-            <a:avLst/>
-          </a:prstGeom>
-          <a:solidFill>
-            <a:srgbClr val="FFFFFF"/>
-          </a:solidFill>
-          <a:ln w="25400">
-            <a:solidFill>
-              <a:srgbClr val="3A4A5A"/>
-            </a:solidFill>
-          </a:ln>
-          <a:effectLst/>
-        </p:spPr>
-        <p:style>
-          <a:lnRef idx="1">
-            <a:schemeClr val="accent1"/>
-          </a:lnRef>
-          <a:fillRef idx="3">
-            <a:schemeClr val="accent1"/>
-          </a:fillRef>
-          <a:effectRef idx="2">
-            <a:schemeClr val="accent1"/>
-          </a:effectRef>
-          <a:fontRef idx="minor">
-            <a:schemeClr val="lt1"/>
-          </a:fontRef>
-        </p:style>
-        <p:txBody>
-          <a:bodyPr rtlCol="0" anchor="ctr"/>
-          <a:lstStyle/>
-          <a:p>
-            <a:pPr algn="ctr"/>
-          </a:p>
-        </p:txBody>
-      </p:sp>
-      <p:sp>
-        <p:nvSpPr>
-          <p:cNvPr id="9" name="Rectangle 8"/>
-          <p:cNvSpPr/>
-          <p:nvPr/>
-        </p:nvSpPr>
-        <p:spPr>
-          <a:xfrm>
-            <a:off x="502920" y="1920240"/>
-            <a:ext cx="2084831" cy="88900"/>
-          </a:xfrm>
-          <a:prstGeom prst="rect">
-            <a:avLst/>
-          </a:prstGeom>
-          <a:solidFill>
-            <a:srgbClr val="3A4A5A"/>
-          </a:solidFill>
-          <a:ln>
-            <a:noFill/>
-          </a:ln>
-          <a:effectLst/>
-        </p:spPr>
-        <p:style>
-          <a:lnRef idx="1">
-            <a:schemeClr val="accent1"/>
-          </a:lnRef>
-          <a:fillRef idx="3">
-            <a:schemeClr val="accent1"/>
-          </a:fillRef>
-          <a:effectRef idx="2">
-            <a:schemeClr val="accent1"/>
-          </a:effectRef>
-          <a:fontRef idx="minor">
-            <a:schemeClr val="lt1"/>
-          </a:fontRef>
-        </p:style>
-        <p:txBody>
-          <a:bodyPr rtlCol="0" anchor="ctr"/>
-          <a:lstStyle/>
-          <a:p>
-            <a:pPr algn="ctr"/>
-          </a:p>
-        </p:txBody>
-      </p:sp>
-      <p:sp>
-        <p:nvSpPr>
-          <p:cNvPr id="10" name="TextBox 9"/>
-          <p:cNvSpPr txBox="1"/>
-          <p:nvPr/>
-        </p:nvSpPr>
-        <p:spPr>
-          <a:xfrm>
-            <a:off x="612648" y="2084832"/>
-            <a:ext cx="1865375" cy="548640"/>
-          </a:xfrm>
-          <a:prstGeom prst="rect">
-            <a:avLst/>
-          </a:prstGeom>
-          <a:noFill/>
-        </p:spPr>
-        <p:txBody>
-          <a:bodyPr wrap="square" anchor="t">
-            <a:spAutoFit/>
-          </a:bodyPr>
-          <a:lstStyle/>
-          <a:p>
-            <a:pPr algn="ctr">
-              <a:lnSpc>
-                <a:spcPct val="100000"/>
-              </a:lnSpc>
-              <a:spcAft>
-                <a:spcPts val="600"/>
-              </a:spcAft>
-            </a:pPr>
-            <a:r>
-              <a:rPr sz="1400" b="1" i="0">
-                <a:solidFill>
-                  <a:srgbClr val="3A4A5A"/>
-                </a:solidFill>
-                <a:latin typeface="Calibri"/>
-              </a:rPr>
-              <a:t>Legacy source</a:t>
-            </a:r>
-          </a:p>
-        </p:txBody>
-      </p:sp>
-      <p:sp>
-        <p:nvSpPr>
-          <p:cNvPr id="11" name="TextBox 10"/>
-          <p:cNvSpPr txBox="1"/>
-          <p:nvPr/>
-        </p:nvSpPr>
-        <p:spPr>
-          <a:xfrm>
-            <a:off x="612648" y="2578608"/>
-            <a:ext cx="1865375" cy="822960"/>
-          </a:xfrm>
-          <a:prstGeom prst="rect">
-            <a:avLst/>
-          </a:prstGeom>
-          <a:noFill/>
-        </p:spPr>
-        <p:txBody>
-          <a:bodyPr wrap="square" anchor="t">
-            <a:spAutoFit/>
-          </a:bodyPr>
-          <a:lstStyle/>
-          <a:p>
-            <a:pPr algn="ctr">
-              <a:lnSpc>
-                <a:spcPct val="100000"/>
-              </a:lnSpc>
-              <a:spcAft>
-                <a:spcPts val="200"/>
-              </a:spcAft>
-            </a:pPr>
-            <a:r>
-              <a:rPr sz="1100" b="0" i="0">
-                <a:solidFill>
-                  <a:srgbClr val="3A4A5A"/>
-                </a:solidFill>
-                <a:latin typeface="Calibri"/>
-              </a:rPr>
-              <a:t>COBOL · copybooks · JCL · SQL</a:t>
-            </a:r>
-          </a:p>
-        </p:txBody>
-      </p:sp>
-      <p:sp>
-        <p:nvSpPr>
-          <p:cNvPr id="12" name="TextBox 11"/>
-          <p:cNvSpPr txBox="1"/>
-          <p:nvPr/>
-        </p:nvSpPr>
-        <p:spPr>
-          <a:xfrm>
-            <a:off x="2569463" y="2468880"/>
-            <a:ext cx="201168" cy="457200"/>
-          </a:xfrm>
-          <a:prstGeom prst="rect">
-            <a:avLst/>
-          </a:prstGeom>
-          <a:noFill/>
-        </p:spPr>
-        <p:txBody>
-          <a:bodyPr wrap="square" anchor="t">
-            <a:spAutoFit/>
-          </a:bodyPr>
-          <a:lstStyle/>
-          <a:p>
-            <a:pPr algn="ctr">
-              <a:lnSpc>
-                <a:spcPct val="100000"/>
-              </a:lnSpc>
-              <a:spcAft>
-                <a:spcPts val="600"/>
-              </a:spcAft>
-            </a:pPr>
-            <a:r>
-              <a:rPr sz="1600" b="1" i="0">
-                <a:solidFill>
-                  <a:srgbClr val="E89B1D"/>
-                </a:solidFill>
-                <a:latin typeface="Calibri"/>
-              </a:rPr>
-              <a:t>▶</a:t>
-            </a:r>
-          </a:p>
-        </p:txBody>
-      </p:sp>
-      <p:sp>
-        <p:nvSpPr>
-          <p:cNvPr id="13" name="Rectangle 12"/>
-          <p:cNvSpPr/>
-          <p:nvPr/>
-        </p:nvSpPr>
-        <p:spPr>
-          <a:xfrm>
-            <a:off x="2752343" y="1920240"/>
-            <a:ext cx="2084831" cy="1554480"/>
-          </a:xfrm>
-          <a:prstGeom prst="rect">
-            <a:avLst/>
-          </a:prstGeom>
-          <a:solidFill>
-            <a:srgbClr val="FFFFFF"/>
-          </a:solidFill>
-          <a:ln w="25400">
-            <a:solidFill>
-              <a:srgbClr val="149EC8"/>
-            </a:solidFill>
-          </a:ln>
-          <a:effectLst/>
-        </p:spPr>
-        <p:style>
-          <a:lnRef idx="1">
-            <a:schemeClr val="accent1"/>
-          </a:lnRef>
-          <a:fillRef idx="3">
-            <a:schemeClr val="accent1"/>
-          </a:fillRef>
-          <a:effectRef idx="2">
-            <a:schemeClr val="accent1"/>
-          </a:effectRef>
-          <a:fontRef idx="minor">
-            <a:schemeClr val="lt1"/>
-          </a:fontRef>
-        </p:style>
-        <p:txBody>
-          <a:bodyPr rtlCol="0" anchor="ctr"/>
-          <a:lstStyle/>
-          <a:p>
-            <a:pPr algn="ctr"/>
-          </a:p>
-        </p:txBody>
-      </p:sp>
-      <p:sp>
-        <p:nvSpPr>
-          <p:cNvPr id="14" name="Rectangle 13"/>
-          <p:cNvSpPr/>
-          <p:nvPr/>
-        </p:nvSpPr>
-        <p:spPr>
-          <a:xfrm>
-            <a:off x="2752343" y="1920240"/>
-            <a:ext cx="2084831" cy="88900"/>
-          </a:xfrm>
-          <a:prstGeom prst="rect">
-            <a:avLst/>
-          </a:prstGeom>
-          <a:solidFill>
-            <a:srgbClr val="149EC8"/>
-          </a:solidFill>
-          <a:ln>
-            <a:noFill/>
-          </a:ln>
-          <a:effectLst/>
-        </p:spPr>
-        <p:style>
-          <a:lnRef idx="1">
-            <a:schemeClr val="accent1"/>
-          </a:lnRef>
-          <a:fillRef idx="3">
-            <a:schemeClr val="accent1"/>
-          </a:fillRef>
-          <a:effectRef idx="2">
-            <a:schemeClr val="accent1"/>
-          </a:effectRef>
-          <a:fontRef idx="minor">
-            <a:schemeClr val="lt1"/>
-          </a:fontRef>
-        </p:style>
-        <p:txBody>
-          <a:bodyPr rtlCol="0" anchor="ctr"/>
-          <a:lstStyle/>
-          <a:p>
-            <a:pPr algn="ctr"/>
-          </a:p>
-        </p:txBody>
-      </p:sp>
-      <p:sp>
-        <p:nvSpPr>
-          <p:cNvPr id="15" name="TextBox 14"/>
-          <p:cNvSpPr txBox="1"/>
-          <p:nvPr/>
-        </p:nvSpPr>
-        <p:spPr>
-          <a:xfrm>
-            <a:off x="2862071" y="2084832"/>
-            <a:ext cx="1865375" cy="548640"/>
-          </a:xfrm>
-          <a:prstGeom prst="rect">
-            <a:avLst/>
-          </a:prstGeom>
-          <a:noFill/>
-        </p:spPr>
-        <p:txBody>
-          <a:bodyPr wrap="square" anchor="t">
-            <a:spAutoFit/>
-          </a:bodyPr>
-          <a:lstStyle/>
-          <a:p>
-            <a:pPr algn="ctr">
-              <a:lnSpc>
-                <a:spcPct val="100000"/>
-              </a:lnSpc>
-              <a:spcAft>
-                <a:spcPts val="600"/>
-              </a:spcAft>
-            </a:pPr>
-            <a:r>
-              <a:rPr sz="1400" b="1" i="0">
-                <a:solidFill>
-                  <a:srgbClr val="149EC8"/>
-                </a:solidFill>
-                <a:latin typeface="Calibri"/>
-              </a:rPr>
-              <a:t>[1] Extractor</a:t>
-            </a:r>
-          </a:p>
-        </p:txBody>
-      </p:sp>
-      <p:sp>
-        <p:nvSpPr>
-          <p:cNvPr id="16" name="TextBox 15"/>
-          <p:cNvSpPr txBox="1"/>
-          <p:nvPr/>
-        </p:nvSpPr>
-        <p:spPr>
-          <a:xfrm>
-            <a:off x="2862071" y="2578608"/>
-            <a:ext cx="1865375" cy="822960"/>
-          </a:xfrm>
-          <a:prstGeom prst="rect">
-            <a:avLst/>
-          </a:prstGeom>
-          <a:noFill/>
-        </p:spPr>
-        <p:txBody>
-          <a:bodyPr wrap="square" anchor="t">
-            <a:spAutoFit/>
-          </a:bodyPr>
-          <a:lstStyle/>
-          <a:p>
-            <a:pPr algn="ctr">
-              <a:lnSpc>
-                <a:spcPct val="100000"/>
-              </a:lnSpc>
-              <a:spcAft>
-                <a:spcPts val="200"/>
-              </a:spcAft>
-            </a:pPr>
-            <a:r>
-              <a:rPr sz="1100" b="0" i="0">
-                <a:solidFill>
-                  <a:srgbClr val="3A4A5A"/>
-                </a:solidFill>
-                <a:latin typeface="Calibri"/>
-              </a:rPr>
-              <a:t>heuristic now →</a:t>
-            </a:r>
-          </a:p>
-          <a:p>
-            <a:pPr algn="ctr">
-              <a:lnSpc>
-                <a:spcPct val="100000"/>
-              </a:lnSpc>
-              <a:spcAft>
-                <a:spcPts val="200"/>
-              </a:spcAft>
-            </a:pPr>
-            <a:r>
-              <a:rPr sz="1100" b="0" i="0">
-                <a:solidFill>
-                  <a:srgbClr val="3A4A5A"/>
-                </a:solidFill>
-                <a:latin typeface="Calibri"/>
-              </a:rPr>
-              <a:t>MasterCraft adapter later</a:t>
-            </a:r>
-          </a:p>
-        </p:txBody>
-      </p:sp>
-      <p:sp>
-        <p:nvSpPr>
-          <p:cNvPr id="17" name="TextBox 16"/>
-          <p:cNvSpPr txBox="1"/>
-          <p:nvPr/>
-        </p:nvSpPr>
-        <p:spPr>
-          <a:xfrm>
-            <a:off x="4818886" y="2468880"/>
-            <a:ext cx="201168" cy="457200"/>
-          </a:xfrm>
-          <a:prstGeom prst="rect">
-            <a:avLst/>
-          </a:prstGeom>
-          <a:noFill/>
-        </p:spPr>
-        <p:txBody>
-          <a:bodyPr wrap="square" anchor="t">
-            <a:spAutoFit/>
-          </a:bodyPr>
-          <a:lstStyle/>
-          <a:p>
-            <a:pPr algn="ctr">
-              <a:lnSpc>
-                <a:spcPct val="100000"/>
-              </a:lnSpc>
-              <a:spcAft>
-                <a:spcPts val="600"/>
-              </a:spcAft>
-            </a:pPr>
-            <a:r>
-              <a:rPr sz="1600" b="1" i="0">
-                <a:solidFill>
-                  <a:srgbClr val="E89B1D"/>
-                </a:solidFill>
-                <a:latin typeface="Calibri"/>
-              </a:rPr>
-              <a:t>▶</a:t>
-            </a:r>
-          </a:p>
-        </p:txBody>
-      </p:sp>
-      <p:sp>
-        <p:nvSpPr>
-          <p:cNvPr id="18" name="Rectangle 17"/>
-          <p:cNvSpPr/>
-          <p:nvPr/>
-        </p:nvSpPr>
-        <p:spPr>
-          <a:xfrm>
-            <a:off x="5001766" y="1920240"/>
-            <a:ext cx="2084831" cy="1554480"/>
-          </a:xfrm>
-          <a:prstGeom prst="rect">
-            <a:avLst/>
-          </a:prstGeom>
-          <a:solidFill>
-            <a:srgbClr val="FFFFFF"/>
-          </a:solidFill>
-          <a:ln w="25400">
-            <a:solidFill>
-              <a:srgbClr val="0B2447"/>
-            </a:solidFill>
-          </a:ln>
-          <a:effectLst/>
-        </p:spPr>
-        <p:style>
-          <a:lnRef idx="1">
-            <a:schemeClr val="accent1"/>
-          </a:lnRef>
-          <a:fillRef idx="3">
-            <a:schemeClr val="accent1"/>
-          </a:fillRef>
-          <a:effectRef idx="2">
-            <a:schemeClr val="accent1"/>
-          </a:effectRef>
-          <a:fontRef idx="minor">
-            <a:schemeClr val="lt1"/>
-          </a:fontRef>
-        </p:style>
-        <p:txBody>
-          <a:bodyPr rtlCol="0" anchor="ctr"/>
-          <a:lstStyle/>
-          <a:p>
-            <a:pPr algn="ctr"/>
-          </a:p>
-        </p:txBody>
-      </p:sp>
-      <p:sp>
-        <p:nvSpPr>
-          <p:cNvPr id="19" name="Rectangle 18"/>
-          <p:cNvSpPr/>
-          <p:nvPr/>
-        </p:nvSpPr>
-        <p:spPr>
-          <a:xfrm>
-            <a:off x="5001766" y="1920240"/>
-            <a:ext cx="2084831" cy="88900"/>
-          </a:xfrm>
-          <a:prstGeom prst="rect">
-            <a:avLst/>
-          </a:prstGeom>
-          <a:solidFill>
-            <a:srgbClr val="0B2447"/>
-          </a:solidFill>
-          <a:ln>
-            <a:noFill/>
-          </a:ln>
-          <a:effectLst/>
-        </p:spPr>
-        <p:style>
-          <a:lnRef idx="1">
-            <a:schemeClr val="accent1"/>
-          </a:lnRef>
-          <a:fillRef idx="3">
-            <a:schemeClr val="accent1"/>
-          </a:fillRef>
-          <a:effectRef idx="2">
-            <a:schemeClr val="accent1"/>
-          </a:effectRef>
-          <a:fontRef idx="minor">
-            <a:schemeClr val="lt1"/>
-          </a:fontRef>
-        </p:style>
-        <p:txBody>
-          <a:bodyPr rtlCol="0" anchor="ctr"/>
-          <a:lstStyle/>
-          <a:p>
-            <a:pPr algn="ctr"/>
-          </a:p>
-        </p:txBody>
-      </p:sp>
-      <p:sp>
-        <p:nvSpPr>
-          <p:cNvPr id="20" name="TextBox 19"/>
-          <p:cNvSpPr txBox="1"/>
-          <p:nvPr/>
-        </p:nvSpPr>
-        <p:spPr>
-          <a:xfrm>
-            <a:off x="5111494" y="2084832"/>
-            <a:ext cx="1865375" cy="548640"/>
-          </a:xfrm>
-          <a:prstGeom prst="rect">
-            <a:avLst/>
-          </a:prstGeom>
-          <a:noFill/>
-        </p:spPr>
-        <p:txBody>
-          <a:bodyPr wrap="square" anchor="t">
-            <a:spAutoFit/>
-          </a:bodyPr>
-          <a:lstStyle/>
-          <a:p>
-            <a:pPr algn="ctr">
-              <a:lnSpc>
-                <a:spcPct val="100000"/>
-              </a:lnSpc>
-              <a:spcAft>
-                <a:spcPts val="600"/>
-              </a:spcAft>
-            </a:pPr>
-            <a:r>
-              <a:rPr sz="1400" b="1" i="0">
-                <a:solidFill>
-                  <a:srgbClr val="0B2447"/>
-                </a:solidFill>
-                <a:latin typeface="Calibri"/>
-              </a:rPr>
-              <a:t>[2] KDM-lite graph</a:t>
-            </a:r>
-          </a:p>
-        </p:txBody>
-      </p:sp>
-      <p:sp>
-        <p:nvSpPr>
-          <p:cNvPr id="21" name="TextBox 20"/>
-          <p:cNvSpPr txBox="1"/>
-          <p:nvPr/>
-        </p:nvSpPr>
-        <p:spPr>
-          <a:xfrm>
-            <a:off x="5111494" y="2578608"/>
-            <a:ext cx="1865375" cy="822960"/>
-          </a:xfrm>
-          <a:prstGeom prst="rect">
-            <a:avLst/>
-          </a:prstGeom>
-          <a:noFill/>
-        </p:spPr>
-        <p:txBody>
-          <a:bodyPr wrap="square" anchor="t">
-            <a:spAutoFit/>
-          </a:bodyPr>
-          <a:lstStyle/>
-          <a:p>
-            <a:pPr algn="ctr">
-              <a:lnSpc>
-                <a:spcPct val="100000"/>
-              </a:lnSpc>
-              <a:spcAft>
-                <a:spcPts val="200"/>
-              </a:spcAft>
-            </a:pPr>
-            <a:r>
-              <a:rPr sz="1100" b="0" i="0">
-                <a:solidFill>
-                  <a:srgbClr val="3A4A5A"/>
-                </a:solidFill>
-                <a:latin typeface="Calibri"/>
-              </a:rPr>
-              <a:t>typed nodes + edges</a:t>
-            </a:r>
-          </a:p>
-          <a:p>
-            <a:pPr algn="ctr">
-              <a:lnSpc>
-                <a:spcPct val="100000"/>
-              </a:lnSpc>
-              <a:spcAft>
-                <a:spcPts val="200"/>
-              </a:spcAft>
-            </a:pPr>
-            <a:r>
-              <a:rPr sz="1100" b="0" i="0">
-                <a:solidFill>
-                  <a:srgbClr val="3A4A5A"/>
-                </a:solidFill>
-                <a:latin typeface="Calibri"/>
-              </a:rPr>
-              <a:t>+ source-line evidence</a:t>
-            </a:r>
-          </a:p>
-        </p:txBody>
-      </p:sp>
-      <p:sp>
-        <p:nvSpPr>
-          <p:cNvPr id="22" name="TextBox 21"/>
-          <p:cNvSpPr txBox="1"/>
-          <p:nvPr/>
-        </p:nvSpPr>
-        <p:spPr>
-          <a:xfrm>
-            <a:off x="7068309" y="2468880"/>
-            <a:ext cx="201168" cy="457200"/>
-          </a:xfrm>
-          <a:prstGeom prst="rect">
-            <a:avLst/>
-          </a:prstGeom>
-          <a:noFill/>
-        </p:spPr>
-        <p:txBody>
-          <a:bodyPr wrap="square" anchor="t">
-            <a:spAutoFit/>
-          </a:bodyPr>
-          <a:lstStyle/>
-          <a:p>
-            <a:pPr algn="ctr">
-              <a:lnSpc>
-                <a:spcPct val="100000"/>
-              </a:lnSpc>
-              <a:spcAft>
-                <a:spcPts val="600"/>
-              </a:spcAft>
-            </a:pPr>
-            <a:r>
-              <a:rPr sz="1600" b="1" i="0">
-                <a:solidFill>
-                  <a:srgbClr val="E89B1D"/>
-                </a:solidFill>
-                <a:latin typeface="Calibri"/>
-              </a:rPr>
-              <a:t>▶</a:t>
-            </a:r>
-          </a:p>
-        </p:txBody>
-      </p:sp>
-      <p:sp>
-        <p:nvSpPr>
-          <p:cNvPr id="23" name="Rectangle 22"/>
-          <p:cNvSpPr/>
-          <p:nvPr/>
-        </p:nvSpPr>
-        <p:spPr>
-          <a:xfrm>
-            <a:off x="7251189" y="1920240"/>
-            <a:ext cx="2084831" cy="1554480"/>
-          </a:xfrm>
-          <a:prstGeom prst="rect">
-            <a:avLst/>
-          </a:prstGeom>
-          <a:solidFill>
-            <a:srgbClr val="FFFFFF"/>
-          </a:solidFill>
-          <a:ln w="25400">
-            <a:solidFill>
-              <a:srgbClr val="149EC8"/>
-            </a:solidFill>
-          </a:ln>
-          <a:effectLst/>
-        </p:spPr>
-        <p:style>
-          <a:lnRef idx="1">
-            <a:schemeClr val="accent1"/>
-          </a:lnRef>
-          <a:fillRef idx="3">
-            <a:schemeClr val="accent1"/>
-          </a:fillRef>
-          <a:effectRef idx="2">
-            <a:schemeClr val="accent1"/>
-          </a:effectRef>
-          <a:fontRef idx="minor">
-            <a:schemeClr val="lt1"/>
-          </a:fontRef>
-        </p:style>
-        <p:txBody>
-          <a:bodyPr rtlCol="0" anchor="ctr"/>
-          <a:lstStyle/>
-          <a:p>
-            <a:pPr algn="ctr"/>
-          </a:p>
-        </p:txBody>
-      </p:sp>
-      <p:sp>
-        <p:nvSpPr>
-          <p:cNvPr id="24" name="Rectangle 23"/>
-          <p:cNvSpPr/>
-          <p:nvPr/>
-        </p:nvSpPr>
-        <p:spPr>
-          <a:xfrm>
-            <a:off x="7251189" y="1920240"/>
-            <a:ext cx="2084831" cy="88900"/>
-          </a:xfrm>
-          <a:prstGeom prst="rect">
-            <a:avLst/>
-          </a:prstGeom>
-          <a:solidFill>
-            <a:srgbClr val="149EC8"/>
-          </a:solidFill>
-          <a:ln>
-            <a:noFill/>
-          </a:ln>
-          <a:effectLst/>
-        </p:spPr>
-        <p:style>
-          <a:lnRef idx="1">
-            <a:schemeClr val="accent1"/>
-          </a:lnRef>
-          <a:fillRef idx="3">
-            <a:schemeClr val="accent1"/>
-          </a:fillRef>
-          <a:effectRef idx="2">
-            <a:schemeClr val="accent1"/>
-          </a:effectRef>
-          <a:fontRef idx="minor">
-            <a:schemeClr val="lt1"/>
-          </a:fontRef>
-        </p:style>
-        <p:txBody>
-          <a:bodyPr rtlCol="0" anchor="ctr"/>
-          <a:lstStyle/>
-          <a:p>
-            <a:pPr algn="ctr"/>
-          </a:p>
-        </p:txBody>
-      </p:sp>
-      <p:sp>
-        <p:nvSpPr>
-          <p:cNvPr id="25" name="TextBox 24"/>
-          <p:cNvSpPr txBox="1"/>
-          <p:nvPr/>
-        </p:nvSpPr>
-        <p:spPr>
-          <a:xfrm>
-            <a:off x="7360917" y="2084832"/>
-            <a:ext cx="1865375" cy="548640"/>
-          </a:xfrm>
-          <a:prstGeom prst="rect">
-            <a:avLst/>
-          </a:prstGeom>
-          <a:noFill/>
-        </p:spPr>
-        <p:txBody>
-          <a:bodyPr wrap="square" anchor="t">
-            <a:spAutoFit/>
-          </a:bodyPr>
-          <a:lstStyle/>
-          <a:p>
-            <a:pPr algn="ctr">
-              <a:lnSpc>
-                <a:spcPct val="100000"/>
-              </a:lnSpc>
-              <a:spcAft>
-                <a:spcPts val="600"/>
-              </a:spcAft>
-            </a:pPr>
-            <a:r>
-              <a:rPr sz="1400" b="1" i="0">
-                <a:solidFill>
-                  <a:srgbClr val="149EC8"/>
-                </a:solidFill>
-                <a:latin typeface="Calibri"/>
-              </a:rPr>
-              <a:t>[3] Cluster</a:t>
-            </a:r>
-          </a:p>
-        </p:txBody>
-      </p:sp>
-      <p:sp>
-        <p:nvSpPr>
-          <p:cNvPr id="26" name="TextBox 25"/>
-          <p:cNvSpPr txBox="1"/>
-          <p:nvPr/>
-        </p:nvSpPr>
-        <p:spPr>
-          <a:xfrm>
-            <a:off x="7360917" y="2578608"/>
-            <a:ext cx="1865375" cy="822960"/>
-          </a:xfrm>
-          <a:prstGeom prst="rect">
-            <a:avLst/>
-          </a:prstGeom>
-          <a:noFill/>
-        </p:spPr>
-        <p:txBody>
-          <a:bodyPr wrap="square" anchor="t">
-            <a:spAutoFit/>
-          </a:bodyPr>
-          <a:lstStyle/>
-          <a:p>
-            <a:pPr algn="ctr">
-              <a:lnSpc>
-                <a:spcPct val="100000"/>
-              </a:lnSpc>
-              <a:spcAft>
-                <a:spcPts val="200"/>
-              </a:spcAft>
-            </a:pPr>
-            <a:r>
-              <a:rPr sz="1100" b="0" i="0">
-                <a:solidFill>
-                  <a:srgbClr val="3A4A5A"/>
-                </a:solidFill>
-                <a:latin typeface="Calibri"/>
-              </a:rPr>
-              <a:t>functional-area</a:t>
-            </a:r>
-          </a:p>
-          <a:p>
-            <a:pPr algn="ctr">
-              <a:lnSpc>
-                <a:spcPct val="100000"/>
-              </a:lnSpc>
-              <a:spcAft>
-                <a:spcPts val="200"/>
-              </a:spcAft>
-            </a:pPr>
-            <a:r>
-              <a:rPr sz="1100" b="0" i="0">
-                <a:solidFill>
-                  <a:srgbClr val="3A4A5A"/>
-                </a:solidFill>
-                <a:latin typeface="Calibri"/>
-              </a:rPr>
-              <a:t>detection</a:t>
-            </a:r>
-          </a:p>
-        </p:txBody>
-      </p:sp>
-      <p:sp>
-        <p:nvSpPr>
-          <p:cNvPr id="27" name="TextBox 26"/>
-          <p:cNvSpPr txBox="1"/>
-          <p:nvPr/>
-        </p:nvSpPr>
-        <p:spPr>
-          <a:xfrm>
-            <a:off x="9317732" y="2468880"/>
-            <a:ext cx="201168" cy="457200"/>
-          </a:xfrm>
-          <a:prstGeom prst="rect">
-            <a:avLst/>
-          </a:prstGeom>
-          <a:noFill/>
-        </p:spPr>
-        <p:txBody>
-          <a:bodyPr wrap="square" anchor="t">
-            <a:spAutoFit/>
-          </a:bodyPr>
-          <a:lstStyle/>
-          <a:p>
-            <a:pPr algn="ctr">
-              <a:lnSpc>
-                <a:spcPct val="100000"/>
-              </a:lnSpc>
-              <a:spcAft>
-                <a:spcPts val="600"/>
-              </a:spcAft>
-            </a:pPr>
-            <a:r>
-              <a:rPr sz="1600" b="1" i="0">
-                <a:solidFill>
-                  <a:srgbClr val="E89B1D"/>
-                </a:solidFill>
-                <a:latin typeface="Calibri"/>
-              </a:rPr>
-              <a:t>▶</a:t>
-            </a:r>
-          </a:p>
-        </p:txBody>
-      </p:sp>
-      <p:sp>
-        <p:nvSpPr>
-          <p:cNvPr id="28" name="Rectangle 27"/>
-          <p:cNvSpPr/>
-          <p:nvPr/>
-        </p:nvSpPr>
-        <p:spPr>
-          <a:xfrm>
-            <a:off x="9500612" y="1920240"/>
-            <a:ext cx="2084831" cy="1554480"/>
-          </a:xfrm>
-          <a:prstGeom prst="rect">
-            <a:avLst/>
-          </a:prstGeom>
-          <a:solidFill>
-            <a:srgbClr val="FFFFFF"/>
-          </a:solidFill>
-          <a:ln w="25400">
-            <a:solidFill>
-              <a:srgbClr val="0B2447"/>
-            </a:solidFill>
-          </a:ln>
-          <a:effectLst/>
-        </p:spPr>
-        <p:style>
-          <a:lnRef idx="1">
-            <a:schemeClr val="accent1"/>
-          </a:lnRef>
-          <a:fillRef idx="3">
-            <a:schemeClr val="accent1"/>
-          </a:fillRef>
-          <a:effectRef idx="2">
-            <a:schemeClr val="accent1"/>
-          </a:effectRef>
-          <a:fontRef idx="minor">
-            <a:schemeClr val="lt1"/>
-          </a:fontRef>
-        </p:style>
-        <p:txBody>
-          <a:bodyPr rtlCol="0" anchor="ctr"/>
-          <a:lstStyle/>
-          <a:p>
-            <a:pPr algn="ctr"/>
-          </a:p>
-        </p:txBody>
-      </p:sp>
-      <p:sp>
-        <p:nvSpPr>
-          <p:cNvPr id="29" name="Rectangle 28"/>
-          <p:cNvSpPr/>
-          <p:nvPr/>
-        </p:nvSpPr>
-        <p:spPr>
-          <a:xfrm>
-            <a:off x="9500612" y="1920240"/>
-            <a:ext cx="2084831" cy="88900"/>
-          </a:xfrm>
-          <a:prstGeom prst="rect">
-            <a:avLst/>
-          </a:prstGeom>
-          <a:solidFill>
-            <a:srgbClr val="0B2447"/>
-          </a:solidFill>
-          <a:ln>
-            <a:noFill/>
-          </a:ln>
-          <a:effectLst/>
-        </p:spPr>
-        <p:style>
-          <a:lnRef idx="1">
-            <a:schemeClr val="accent1"/>
-          </a:lnRef>
-          <a:fillRef idx="3">
-            <a:schemeClr val="accent1"/>
-          </a:fillRef>
-          <a:effectRef idx="2">
-            <a:schemeClr val="accent1"/>
-          </a:effectRef>
-          <a:fontRef idx="minor">
-            <a:schemeClr val="lt1"/>
-          </a:fontRef>
-        </p:style>
-        <p:txBody>
-          <a:bodyPr rtlCol="0" anchor="ctr"/>
-          <a:lstStyle/>
-          <a:p>
-            <a:pPr algn="ctr"/>
-          </a:p>
-        </p:txBody>
-      </p:sp>
-      <p:sp>
-        <p:nvSpPr>
-          <p:cNvPr id="30" name="TextBox 29"/>
-          <p:cNvSpPr txBox="1"/>
-          <p:nvPr/>
-        </p:nvSpPr>
-        <p:spPr>
-          <a:xfrm>
-            <a:off x="9610340" y="2084832"/>
-            <a:ext cx="1865375" cy="548640"/>
-          </a:xfrm>
-          <a:prstGeom prst="rect">
-            <a:avLst/>
-          </a:prstGeom>
-          <a:noFill/>
-        </p:spPr>
-        <p:txBody>
-          <a:bodyPr wrap="square" anchor="t">
-            <a:spAutoFit/>
-          </a:bodyPr>
-          <a:lstStyle/>
-          <a:p>
-            <a:pPr algn="ctr">
-              <a:lnSpc>
-                <a:spcPct val="100000"/>
-              </a:lnSpc>
-              <a:spcAft>
-                <a:spcPts val="600"/>
-              </a:spcAft>
-            </a:pPr>
-            <a:r>
-              <a:rPr sz="1400" b="1" i="0">
-                <a:solidFill>
-                  <a:srgbClr val="0B2447"/>
-                </a:solidFill>
-                <a:latin typeface="Calibri"/>
-              </a:rPr>
-              <a:t>[4] Grounded specs</a:t>
-            </a:r>
-          </a:p>
-        </p:txBody>
-      </p:sp>
-      <p:sp>
-        <p:nvSpPr>
-          <p:cNvPr id="31" name="TextBox 30"/>
-          <p:cNvSpPr txBox="1"/>
-          <p:nvPr/>
-        </p:nvSpPr>
-        <p:spPr>
-          <a:xfrm>
-            <a:off x="9610340" y="2578608"/>
-            <a:ext cx="1865375" cy="822960"/>
-          </a:xfrm>
-          <a:prstGeom prst="rect">
-            <a:avLst/>
-          </a:prstGeom>
-          <a:noFill/>
-        </p:spPr>
-        <p:txBody>
-          <a:bodyPr wrap="square" anchor="t">
-            <a:spAutoFit/>
-          </a:bodyPr>
-          <a:lstStyle/>
-          <a:p>
-            <a:pPr algn="ctr">
-              <a:lnSpc>
-                <a:spcPct val="100000"/>
-              </a:lnSpc>
-              <a:spcAft>
-                <a:spcPts val="200"/>
-              </a:spcAft>
-            </a:pPr>
-            <a:r>
-              <a:rPr sz="1100" b="0" i="0">
-                <a:solidFill>
-                  <a:srgbClr val="3A4A5A"/>
-                </a:solidFill>
-                <a:latin typeface="Calibri"/>
-              </a:rPr>
-              <a:t>evidence-cited</a:t>
-            </a:r>
-          </a:p>
-          <a:p>
-            <a:pPr algn="ctr">
-              <a:lnSpc>
-                <a:spcPct val="100000"/>
-              </a:lnSpc>
-              <a:spcAft>
-                <a:spcPts val="200"/>
-              </a:spcAft>
-            </a:pPr>
-            <a:r>
-              <a:rPr sz="1100" b="0" i="0">
-                <a:solidFill>
-                  <a:srgbClr val="3A4A5A"/>
-                </a:solidFill>
-                <a:latin typeface="Calibri"/>
-              </a:rPr>
-              <a:t>markdown specs</a:t>
-            </a:r>
-          </a:p>
-        </p:txBody>
-      </p:sp>
-      <p:sp>
-        <p:nvSpPr>
-          <p:cNvPr id="32" name="TextBox 31"/>
-          <p:cNvSpPr txBox="1"/>
-          <p:nvPr/>
-        </p:nvSpPr>
-        <p:spPr>
-          <a:xfrm>
-            <a:off x="548640" y="3977639"/>
-            <a:ext cx="11064240" cy="5120640"/>
-          </a:xfrm>
-          <a:prstGeom prst="rect">
-            <a:avLst/>
-          </a:prstGeom>
-          <a:noFill/>
-        </p:spPr>
-        <p:txBody>
-          <a:bodyPr wrap="square" anchor="t">
-            <a:spAutoFit/>
-          </a:bodyPr>
-          <a:lstStyle/>
-          <a:p>
-            <a:pPr algn="l">
-              <a:lnSpc>
-                <a:spcPct val="105000"/>
-              </a:lnSpc>
-              <a:spcAft>
-                <a:spcPts val="1000"/>
-              </a:spcAft>
-            </a:pPr>
-            <a:r>
-              <a:rPr sz="1600" b="1" i="0">
-                <a:solidFill>
-                  <a:srgbClr val="149EC8"/>
-                </a:solidFill>
-                <a:latin typeface="Calibri"/>
-              </a:rPr>
-              <a:t>▸  </a:t>
-            </a:r>
-            <a:r>
-              <a:rPr sz="1600" b="0" i="0">
-                <a:solidFill>
-                  <a:srgbClr val="3A4A5A"/>
-                </a:solidFill>
-                <a:latin typeface="Calibri"/>
-              </a:rPr>
-              <a:t>Branch at [2]: load into Neo4j for interactive Cypher / GDS, and run GraphRAG + simple-RAG over the same corpus.</a:t>
-            </a:r>
-          </a:p>
-          <a:p>
-            <a:pPr algn="l">
-              <a:lnSpc>
-                <a:spcPct val="105000"/>
-              </a:lnSpc>
-              <a:spcAft>
-                <a:spcPts val="1000"/>
-              </a:spcAft>
-            </a:pPr>
-            <a:r>
-              <a:rPr sz="1600" b="1" i="0">
-                <a:solidFill>
-                  <a:srgbClr val="149EC8"/>
-                </a:solidFill>
-                <a:latin typeface="Calibri"/>
-              </a:rPr>
-              <a:t>▸  </a:t>
-            </a:r>
-            <a:r>
-              <a:rPr sz="1600" b="1" i="0">
-                <a:solidFill>
-                  <a:srgbClr val="2E8B57"/>
-                </a:solidFill>
-                <a:latin typeface="Calibri"/>
-              </a:rPr>
-              <a:t>Core path is stdlib-only — no DB, no pip — so it runs anywhere, including locked-down sandboxes.</a:t>
-            </a:r>
-          </a:p>
-        </p:txBody>
-      </p:sp>
-      <p:sp>
-        <p:nvSpPr>
-          <p:cNvPr id="33" name="Rectangle 32"/>
-          <p:cNvSpPr/>
-          <p:nvPr/>
-        </p:nvSpPr>
-        <p:spPr>
-          <a:xfrm>
-            <a:off x="548640" y="5852160"/>
-            <a:ext cx="11064240" cy="548640"/>
-          </a:xfrm>
-          <a:prstGeom prst="rect">
-            <a:avLst/>
-          </a:prstGeom>
-          <a:solidFill>
-            <a:srgbClr val="F2F5F8"/>
-          </a:solidFill>
-          <a:ln w="12700">
-            <a:solidFill>
-              <a:srgbClr val="149EC8"/>
-            </a:solidFill>
-          </a:ln>
-          <a:effectLst/>
-        </p:spPr>
-        <p:style>
-          <a:lnRef idx="1">
-            <a:schemeClr val="accent1"/>
-          </a:lnRef>
-          <a:fillRef idx="3">
-            <a:schemeClr val="accent1"/>
-          </a:fillRef>
-          <a:effectRef idx="2">
-            <a:schemeClr val="accent1"/>
-          </a:effectRef>
-          <a:fontRef idx="minor">
-            <a:schemeClr val="lt1"/>
-          </a:fontRef>
-        </p:style>
-        <p:txBody>
-          <a:bodyPr rtlCol="0" anchor="ctr"/>
-          <a:lstStyle/>
-          <a:p>
-            <a:pPr algn="ctr"/>
-          </a:p>
-        </p:txBody>
-      </p:sp>
-      <p:sp>
-        <p:nvSpPr>
-          <p:cNvPr id="34" name="TextBox 33"/>
-          <p:cNvSpPr txBox="1"/>
-          <p:nvPr/>
-        </p:nvSpPr>
-        <p:spPr>
-          <a:xfrm>
-            <a:off x="731520" y="5925312"/>
-            <a:ext cx="10698480" cy="411480"/>
-          </a:xfrm>
-          <a:prstGeom prst="rect">
-            <a:avLst/>
-          </a:prstGeom>
-          <a:noFill/>
-        </p:spPr>
-        <p:txBody>
-          <a:bodyPr wrap="square" anchor="t">
-            <a:spAutoFit/>
-          </a:bodyPr>
-          <a:lstStyle/>
-          <a:p>
-            <a:pPr algn="l">
-              <a:lnSpc>
-                <a:spcPct val="100000"/>
-              </a:lnSpc>
-              <a:spcAft>
-                <a:spcPts val="600"/>
-              </a:spcAft>
-            </a:pPr>
-            <a:r>
-              <a:rPr sz="1400" b="1" i="0">
-                <a:solidFill>
-                  <a:srgbClr val="0B2447"/>
-                </a:solidFill>
-                <a:latin typeface="Calibri"/>
-              </a:rPr>
-              <a:t>Output  →  functional specs + integration points  →  modernization backlog (next phase)</a:t>
-            </a:r>
-          </a:p>
-        </p:txBody>
-      </p:sp>
+              <a:t>One pipeline, evidence end-to-end</a:t>
+            </a:r>
+          </a:p>
+        </p:txBody>
+      </p:sp>
+      <p:pic>
+        <p:nvPicPr>
+          <p:cNvPr id="8" name="Picture 7" descr="architecture.png"/>
+          <p:cNvPicPr>
+            <a:picLocks noChangeAspect="1"/>
+          </p:cNvPicPr>
+          <p:nvPr/>
+        </p:nvPicPr>
+        <p:blipFill>
+          <a:blip r:embed="rId2"/>
+          <a:stretch>
+            <a:fillRect/>
+          </a:stretch>
+        </p:blipFill>
+        <p:spPr>
+          <a:xfrm>
+            <a:off x="513101" y="1234440"/>
+            <a:ext cx="11165493" cy="5486400"/>
+          </a:xfrm>
+          <a:prstGeom prst="rect">
+            <a:avLst/>
+          </a:prstGeom>
+        </p:spPr>
+      </p:pic>
     </p:spTree>
   </p:cSld>
   <p:clrMapOvr>
@@ -10685,6 +10561,584 @@
                 </a:solidFill>
                 <a:latin typeface="Calibri"/>
               </a:rPr>
+              <a:t>THE CODE KNOWLEDGE GRAPH</a:t>
+            </a:r>
+          </a:p>
+        </p:txBody>
+      </p:sp>
+      <p:sp>
+        <p:nvSpPr>
+          <p:cNvPr id="7" name="TextBox 6"/>
+          <p:cNvSpPr txBox="1"/>
+          <p:nvPr/>
+        </p:nvSpPr>
+        <p:spPr>
+          <a:xfrm>
+            <a:off x="457200" y="438912"/>
+            <a:ext cx="11338560" cy="640080"/>
+          </a:xfrm>
+          <a:prstGeom prst="rect">
+            <a:avLst/>
+          </a:prstGeom>
+          <a:noFill/>
+        </p:spPr>
+        <p:txBody>
+          <a:bodyPr wrap="square" anchor="t">
+            <a:spAutoFit/>
+          </a:bodyPr>
+          <a:lstStyle/>
+          <a:p>
+            <a:pPr algn="l">
+              <a:lnSpc>
+                <a:spcPct val="100000"/>
+              </a:lnSpc>
+              <a:spcAft>
+                <a:spcPts val="600"/>
+              </a:spcAft>
+            </a:pPr>
+            <a:r>
+              <a:rPr sz="2600" b="1" i="0">
+                <a:solidFill>
+                  <a:srgbClr val="0B2447"/>
+                </a:solidFill>
+                <a:latin typeface="Calibri"/>
+              </a:rPr>
+              <a:t>Extracted from the sample estate — graph.json</a:t>
+            </a:r>
+          </a:p>
+        </p:txBody>
+      </p:sp>
+      <p:pic>
+        <p:nvPicPr>
+          <p:cNvPr id="8" name="Picture 7" descr="code_graph.png"/>
+          <p:cNvPicPr>
+            <a:picLocks noChangeAspect="1"/>
+          </p:cNvPicPr>
+          <p:nvPr/>
+        </p:nvPicPr>
+        <p:blipFill>
+          <a:blip r:embed="rId2"/>
+          <a:stretch>
+            <a:fillRect/>
+          </a:stretch>
+        </p:blipFill>
+        <p:spPr>
+          <a:xfrm>
+            <a:off x="182880" y="1371600"/>
+            <a:ext cx="7563928" cy="5120640"/>
+          </a:xfrm>
+          <a:prstGeom prst="rect">
+            <a:avLst/>
+          </a:prstGeom>
+        </p:spPr>
+      </p:pic>
+      <p:sp>
+        <p:nvSpPr>
+          <p:cNvPr id="9" name="Rectangle 8"/>
+          <p:cNvSpPr/>
+          <p:nvPr/>
+        </p:nvSpPr>
+        <p:spPr>
+          <a:xfrm>
+            <a:off x="7863840" y="1417320"/>
+            <a:ext cx="4114800" cy="4983480"/>
+          </a:xfrm>
+          <a:prstGeom prst="rect">
+            <a:avLst/>
+          </a:prstGeom>
+          <a:solidFill>
+            <a:srgbClr val="FFFFFF"/>
+          </a:solidFill>
+          <a:ln w="12700">
+            <a:solidFill>
+              <a:srgbClr val="D5DDE3"/>
+            </a:solidFill>
+          </a:ln>
+          <a:effectLst/>
+        </p:spPr>
+        <p:style>
+          <a:lnRef idx="1">
+            <a:schemeClr val="accent1"/>
+          </a:lnRef>
+          <a:fillRef idx="3">
+            <a:schemeClr val="accent1"/>
+          </a:fillRef>
+          <a:effectRef idx="2">
+            <a:schemeClr val="accent1"/>
+          </a:effectRef>
+          <a:fontRef idx="minor">
+            <a:schemeClr val="lt1"/>
+          </a:fontRef>
+        </p:style>
+        <p:txBody>
+          <a:bodyPr rtlCol="0" anchor="ctr"/>
+          <a:lstStyle/>
+          <a:p>
+            <a:pPr algn="ctr"/>
+          </a:p>
+        </p:txBody>
+      </p:sp>
+      <p:sp>
+        <p:nvSpPr>
+          <p:cNvPr id="10" name="TextBox 9"/>
+          <p:cNvSpPr txBox="1"/>
+          <p:nvPr/>
+        </p:nvSpPr>
+        <p:spPr>
+          <a:xfrm>
+            <a:off x="8065008" y="1572768"/>
+            <a:ext cx="3712464" cy="4754880"/>
+          </a:xfrm>
+          <a:prstGeom prst="rect">
+            <a:avLst/>
+          </a:prstGeom>
+          <a:noFill/>
+        </p:spPr>
+        <p:txBody>
+          <a:bodyPr wrap="square" anchor="t">
+            <a:spAutoFit/>
+          </a:bodyPr>
+          <a:lstStyle/>
+          <a:p>
+            <a:pPr algn="l">
+              <a:lnSpc>
+                <a:spcPct val="105000"/>
+              </a:lnSpc>
+              <a:spcAft>
+                <a:spcPts val="900"/>
+              </a:spcAft>
+            </a:pPr>
+            <a:r>
+              <a:rPr sz="1500" b="1" i="0">
+                <a:solidFill>
+                  <a:srgbClr val="0B2447"/>
+                </a:solidFill>
+                <a:latin typeface="Calibri"/>
+              </a:rPr>
+              <a:t>How to read it</a:t>
+            </a:r>
+          </a:p>
+          <a:p>
+            <a:pPr algn="l">
+              <a:lnSpc>
+                <a:spcPct val="105000"/>
+              </a:lnSpc>
+              <a:spcAft>
+                <a:spcPts val="900"/>
+              </a:spcAft>
+            </a:pPr>
+            <a:r>
+              <a:rPr sz="1300" b="1" i="0">
+                <a:solidFill>
+                  <a:srgbClr val="149EC8"/>
+                </a:solidFill>
+                <a:latin typeface="Calibri"/>
+              </a:rPr>
+              <a:t>Colour</a:t>
+            </a:r>
+            <a:r>
+              <a:rPr sz="1300" b="0" i="0">
+                <a:solidFill>
+                  <a:srgbClr val="3A4A5A"/>
+                </a:solidFill>
+                <a:latin typeface="Calibri"/>
+              </a:rPr>
+              <a:t> = functional area (label-propagation cluster).</a:t>
+            </a:r>
+          </a:p>
+          <a:p>
+            <a:pPr algn="l">
+              <a:lnSpc>
+                <a:spcPct val="105000"/>
+              </a:lnSpc>
+              <a:spcAft>
+                <a:spcPts val="900"/>
+              </a:spcAft>
+            </a:pPr>
+            <a:r>
+              <a:rPr sz="1300" b="1" i="0">
+                <a:solidFill>
+                  <a:srgbClr val="149EC8"/>
+                </a:solidFill>
+                <a:latin typeface="Calibri"/>
+              </a:rPr>
+              <a:t>Shape</a:t>
+            </a:r>
+            <a:r>
+              <a:rPr sz="1300" b="0" i="0">
+                <a:solidFill>
+                  <a:srgbClr val="3A4A5A"/>
+                </a:solidFill>
+                <a:latin typeface="Calibri"/>
+              </a:rPr>
+              <a:t> = KDM-lite node type — program (■), datastore (●), screen (▲), copybook (◆), job (⬣).</a:t>
+            </a:r>
+          </a:p>
+          <a:p>
+            <a:pPr algn="l">
+              <a:lnSpc>
+                <a:spcPct val="105000"/>
+              </a:lnSpc>
+              <a:spcAft>
+                <a:spcPts val="900"/>
+              </a:spcAft>
+            </a:pPr>
+            <a:r>
+              <a:rPr sz="1300" b="1" i="0">
+                <a:solidFill>
+                  <a:srgbClr val="149EC8"/>
+                </a:solidFill>
+                <a:latin typeface="Calibri"/>
+              </a:rPr>
+              <a:t>Thin edges</a:t>
+            </a:r>
+            <a:r>
+              <a:rPr sz="1300" b="0" i="0">
+                <a:solidFill>
+                  <a:srgbClr val="3A4A5A"/>
+                </a:solidFill>
+                <a:latin typeface="Calibri"/>
+              </a:rPr>
+              <a:t> = typed dependencies within an area (CALLS / READS_FROM / WRITES_TO / USES_COPYBOOK).</a:t>
+            </a:r>
+          </a:p>
+          <a:p>
+            <a:pPr algn="l">
+              <a:lnSpc>
+                <a:spcPct val="105000"/>
+              </a:lnSpc>
+              <a:spcAft>
+                <a:spcPts val="900"/>
+              </a:spcAft>
+            </a:pPr>
+            <a:r>
+              <a:rPr sz="1300" b="1" i="0">
+                <a:solidFill>
+                  <a:srgbClr val="C0392E"/>
+                </a:solidFill>
+                <a:latin typeface="Calibri"/>
+              </a:rPr>
+              <a:t>Bold red edges</a:t>
+            </a:r>
+            <a:r>
+              <a:rPr sz="1300" b="0" i="0">
+                <a:solidFill>
+                  <a:srgbClr val="3A4A5A"/>
+                </a:solidFill>
+                <a:latin typeface="Calibri"/>
+              </a:rPr>
+              <a:t> = cross-area integration contracts:</a:t>
+            </a:r>
+          </a:p>
+          <a:p>
+            <a:pPr algn="l">
+              <a:lnSpc>
+                <a:spcPct val="105000"/>
+              </a:lnSpc>
+              <a:spcAft>
+                <a:spcPts val="900"/>
+              </a:spcAft>
+            </a:pPr>
+            <a:r>
+              <a:rPr sz="1200" b="1" i="0">
+                <a:solidFill>
+                  <a:srgbClr val="0B2447"/>
+                </a:solidFill>
+                <a:latin typeface="Consolas"/>
+              </a:rPr>
+              <a:t>    CUSTMGMT → ACCTPOST</a:t>
+            </a:r>
+          </a:p>
+          <a:p>
+            <a:pPr algn="l">
+              <a:lnSpc>
+                <a:spcPct val="105000"/>
+              </a:lnSpc>
+              <a:spcAft>
+                <a:spcPts val="900"/>
+              </a:spcAft>
+            </a:pPr>
+            <a:r>
+              <a:rPr sz="1200" b="1" i="0">
+                <a:solidFill>
+                  <a:srgbClr val="0B2447"/>
+                </a:solidFill>
+                <a:latin typeface="Consolas"/>
+              </a:rPr>
+              <a:t>    DAILYRPT → ACCOUNT</a:t>
+            </a:r>
+          </a:p>
+          <a:p>
+            <a:pPr algn="l">
+              <a:lnSpc>
+                <a:spcPct val="105000"/>
+              </a:lnSpc>
+              <a:spcAft>
+                <a:spcPts val="900"/>
+              </a:spcAft>
+            </a:pPr>
+            <a:r>
+              <a:rPr sz="1300" b="0" i="1">
+                <a:solidFill>
+                  <a:srgbClr val="3A4A5A"/>
+                </a:solidFill>
+                <a:latin typeface="Calibri"/>
+              </a:rPr>
+              <a:t>These are the seams that drive modernization sequencing and risk.</a:t>
+            </a:r>
+          </a:p>
+          <a:p>
+            <a:pPr algn="l">
+              <a:lnSpc>
+                <a:spcPct val="105000"/>
+              </a:lnSpc>
+              <a:spcAft>
+                <a:spcPts val="900"/>
+              </a:spcAft>
+            </a:pPr>
+            <a:r>
+              <a:rPr sz="1200" b="1" i="0">
+                <a:solidFill>
+                  <a:srgbClr val="2E8B57"/>
+                </a:solidFill>
+                <a:latin typeface="Calibri"/>
+              </a:rPr>
+              <a:t>Every node &amp; edge links to source_artifact : lines.</a:t>
+            </a:r>
+          </a:p>
+        </p:txBody>
+      </p:sp>
+    </p:spTree>
+  </p:cSld>
+  <p:clrMapOvr>
+    <a:masterClrMapping/>
+  </p:clrMapOvr>
+</p:sld>
+</file>
+
+<file path=ppt/slides/slide8.xml><?xml version="1.0" encoding="utf-8"?>
+<p:sld xmlns:a="http://schemas.openxmlformats.org/drawingml/2006/main" xmlns:p="http://schemas.openxmlformats.org/presentationml/2006/main" xmlns:r="http://schemas.openxmlformats.org/officeDocument/2006/relationships">
+  <p:cSld>
+    <p:spTree>
+      <p:nvGrpSpPr>
+        <p:cNvPr id="1" name=""/>
+        <p:cNvGrpSpPr/>
+        <p:nvPr/>
+      </p:nvGrpSpPr>
+      <p:grpSpPr/>
+      <p:sp>
+        <p:nvSpPr>
+          <p:cNvPr id="2" name="Rectangle 1"/>
+          <p:cNvSpPr/>
+          <p:nvPr/>
+        </p:nvSpPr>
+        <p:spPr>
+          <a:xfrm>
+            <a:off x="0" y="0"/>
+            <a:ext cx="12191695" cy="6858000"/>
+          </a:xfrm>
+          <a:prstGeom prst="rect">
+            <a:avLst/>
+          </a:prstGeom>
+          <a:solidFill>
+            <a:srgbClr val="F2F5F8"/>
+          </a:solidFill>
+          <a:ln>
+            <a:noFill/>
+          </a:ln>
+          <a:effectLst/>
+        </p:spPr>
+        <p:style>
+          <a:lnRef idx="1">
+            <a:schemeClr val="accent1"/>
+          </a:lnRef>
+          <a:fillRef idx="3">
+            <a:schemeClr val="accent1"/>
+          </a:fillRef>
+          <a:effectRef idx="2">
+            <a:schemeClr val="accent1"/>
+          </a:effectRef>
+          <a:fontRef idx="minor">
+            <a:schemeClr val="lt1"/>
+          </a:fontRef>
+        </p:style>
+        <p:txBody>
+          <a:bodyPr rtlCol="0" anchor="ctr"/>
+          <a:lstStyle/>
+          <a:p>
+            <a:pPr algn="ctr"/>
+          </a:p>
+        </p:txBody>
+      </p:sp>
+      <p:sp>
+        <p:nvSpPr>
+          <p:cNvPr id="3" name="Rectangle 2"/>
+          <p:cNvSpPr/>
+          <p:nvPr/>
+        </p:nvSpPr>
+        <p:spPr>
+          <a:xfrm>
+            <a:off x="0" y="0"/>
+            <a:ext cx="12191695" cy="1143000"/>
+          </a:xfrm>
+          <a:prstGeom prst="rect">
+            <a:avLst/>
+          </a:prstGeom>
+          <a:solidFill>
+            <a:srgbClr val="FFFFFF"/>
+          </a:solidFill>
+          <a:ln>
+            <a:noFill/>
+          </a:ln>
+          <a:effectLst/>
+        </p:spPr>
+        <p:style>
+          <a:lnRef idx="1">
+            <a:schemeClr val="accent1"/>
+          </a:lnRef>
+          <a:fillRef idx="3">
+            <a:schemeClr val="accent1"/>
+          </a:fillRef>
+          <a:effectRef idx="2">
+            <a:schemeClr val="accent1"/>
+          </a:effectRef>
+          <a:fontRef idx="minor">
+            <a:schemeClr val="lt1"/>
+          </a:fontRef>
+        </p:style>
+        <p:txBody>
+          <a:bodyPr rtlCol="0" anchor="ctr"/>
+          <a:lstStyle/>
+          <a:p>
+            <a:pPr algn="ctr"/>
+          </a:p>
+        </p:txBody>
+      </p:sp>
+      <p:sp>
+        <p:nvSpPr>
+          <p:cNvPr id="4" name="Rectangle 3"/>
+          <p:cNvSpPr/>
+          <p:nvPr/>
+        </p:nvSpPr>
+        <p:spPr>
+          <a:xfrm>
+            <a:off x="0" y="1078992"/>
+            <a:ext cx="12191695" cy="38100"/>
+          </a:xfrm>
+          <a:prstGeom prst="rect">
+            <a:avLst/>
+          </a:prstGeom>
+          <a:solidFill>
+            <a:srgbClr val="149EC8"/>
+          </a:solidFill>
+          <a:ln>
+            <a:noFill/>
+          </a:ln>
+          <a:effectLst/>
+        </p:spPr>
+        <p:style>
+          <a:lnRef idx="1">
+            <a:schemeClr val="accent1"/>
+          </a:lnRef>
+          <a:fillRef idx="3">
+            <a:schemeClr val="accent1"/>
+          </a:fillRef>
+          <a:effectRef idx="2">
+            <a:schemeClr val="accent1"/>
+          </a:effectRef>
+          <a:fontRef idx="minor">
+            <a:schemeClr val="lt1"/>
+          </a:fontRef>
+        </p:style>
+        <p:txBody>
+          <a:bodyPr rtlCol="0" anchor="ctr"/>
+          <a:lstStyle/>
+          <a:p>
+            <a:pPr algn="ctr"/>
+          </a:p>
+        </p:txBody>
+      </p:sp>
+      <p:sp>
+        <p:nvSpPr>
+          <p:cNvPr id="5" name="Rectangle 4"/>
+          <p:cNvSpPr/>
+          <p:nvPr/>
+        </p:nvSpPr>
+        <p:spPr>
+          <a:xfrm>
+            <a:off x="0" y="0"/>
+            <a:ext cx="127000" cy="1143000"/>
+          </a:xfrm>
+          <a:prstGeom prst="rect">
+            <a:avLst/>
+          </a:prstGeom>
+          <a:solidFill>
+            <a:srgbClr val="149EC8"/>
+          </a:solidFill>
+          <a:ln>
+            <a:noFill/>
+          </a:ln>
+          <a:effectLst/>
+        </p:spPr>
+        <p:style>
+          <a:lnRef idx="1">
+            <a:schemeClr val="accent1"/>
+          </a:lnRef>
+          <a:fillRef idx="3">
+            <a:schemeClr val="accent1"/>
+          </a:fillRef>
+          <a:effectRef idx="2">
+            <a:schemeClr val="accent1"/>
+          </a:effectRef>
+          <a:fontRef idx="minor">
+            <a:schemeClr val="lt1"/>
+          </a:fontRef>
+        </p:style>
+        <p:txBody>
+          <a:bodyPr rtlCol="0" anchor="ctr"/>
+          <a:lstStyle/>
+          <a:p>
+            <a:pPr algn="ctr"/>
+          </a:p>
+        </p:txBody>
+      </p:sp>
+      <p:sp>
+        <p:nvSpPr>
+          <p:cNvPr id="6" name="TextBox 5"/>
+          <p:cNvSpPr txBox="1"/>
+          <p:nvPr/>
+        </p:nvSpPr>
+        <p:spPr>
+          <a:xfrm>
+            <a:off x="502920" y="164592"/>
+            <a:ext cx="10972800" cy="365760"/>
+          </a:xfrm>
+          <a:prstGeom prst="rect">
+            <a:avLst/>
+          </a:prstGeom>
+          <a:noFill/>
+        </p:spPr>
+        <p:txBody>
+          <a:bodyPr wrap="square" anchor="t">
+            <a:spAutoFit/>
+          </a:bodyPr>
+          <a:lstStyle/>
+          <a:p>
+            <a:pPr algn="l">
+              <a:lnSpc>
+                <a:spcPct val="100000"/>
+              </a:lnSpc>
+              <a:spcAft>
+                <a:spcPts val="600"/>
+              </a:spcAft>
+            </a:pPr>
+            <a:r>
+              <a:rPr sz="1200" b="1" i="0">
+                <a:solidFill>
+                  <a:srgbClr val="149EC8"/>
+                </a:solidFill>
+                <a:latin typeface="Calibri"/>
+              </a:rPr>
               <a:t>THREE RETRIEVAL/GENERATION PATHS</a:t>
             </a:r>
           </a:p>
@@ -11235,598 +11689,6 @@
 </p:sld>
 </file>
 
-<file path=ppt/slides/slide8.xml><?xml version="1.0" encoding="utf-8"?>
-<p:sld xmlns:a="http://schemas.openxmlformats.org/drawingml/2006/main" xmlns:p="http://schemas.openxmlformats.org/presentationml/2006/main" xmlns:r="http://schemas.openxmlformats.org/officeDocument/2006/relationships">
-  <p:cSld>
-    <p:spTree>
-      <p:nvGrpSpPr>
-        <p:cNvPr id="1" name=""/>
-        <p:cNvGrpSpPr/>
-        <p:nvPr/>
-      </p:nvGrpSpPr>
-      <p:grpSpPr/>
-      <p:sp>
-        <p:nvSpPr>
-          <p:cNvPr id="2" name="Rectangle 1"/>
-          <p:cNvSpPr/>
-          <p:nvPr/>
-        </p:nvSpPr>
-        <p:spPr>
-          <a:xfrm>
-            <a:off x="0" y="0"/>
-            <a:ext cx="12191695" cy="6858000"/>
-          </a:xfrm>
-          <a:prstGeom prst="rect">
-            <a:avLst/>
-          </a:prstGeom>
-          <a:solidFill>
-            <a:srgbClr val="F2F5F8"/>
-          </a:solidFill>
-          <a:ln>
-            <a:noFill/>
-          </a:ln>
-          <a:effectLst/>
-        </p:spPr>
-        <p:style>
-          <a:lnRef idx="1">
-            <a:schemeClr val="accent1"/>
-          </a:lnRef>
-          <a:fillRef idx="3">
-            <a:schemeClr val="accent1"/>
-          </a:fillRef>
-          <a:effectRef idx="2">
-            <a:schemeClr val="accent1"/>
-          </a:effectRef>
-          <a:fontRef idx="minor">
-            <a:schemeClr val="lt1"/>
-          </a:fontRef>
-        </p:style>
-        <p:txBody>
-          <a:bodyPr rtlCol="0" anchor="ctr"/>
-          <a:lstStyle/>
-          <a:p>
-            <a:pPr algn="ctr"/>
-          </a:p>
-        </p:txBody>
-      </p:sp>
-      <p:sp>
-        <p:nvSpPr>
-          <p:cNvPr id="3" name="Rectangle 2"/>
-          <p:cNvSpPr/>
-          <p:nvPr/>
-        </p:nvSpPr>
-        <p:spPr>
-          <a:xfrm>
-            <a:off x="0" y="0"/>
-            <a:ext cx="12191695" cy="1143000"/>
-          </a:xfrm>
-          <a:prstGeom prst="rect">
-            <a:avLst/>
-          </a:prstGeom>
-          <a:solidFill>
-            <a:srgbClr val="FFFFFF"/>
-          </a:solidFill>
-          <a:ln>
-            <a:noFill/>
-          </a:ln>
-          <a:effectLst/>
-        </p:spPr>
-        <p:style>
-          <a:lnRef idx="1">
-            <a:schemeClr val="accent1"/>
-          </a:lnRef>
-          <a:fillRef idx="3">
-            <a:schemeClr val="accent1"/>
-          </a:fillRef>
-          <a:effectRef idx="2">
-            <a:schemeClr val="accent1"/>
-          </a:effectRef>
-          <a:fontRef idx="minor">
-            <a:schemeClr val="lt1"/>
-          </a:fontRef>
-        </p:style>
-        <p:txBody>
-          <a:bodyPr rtlCol="0" anchor="ctr"/>
-          <a:lstStyle/>
-          <a:p>
-            <a:pPr algn="ctr"/>
-          </a:p>
-        </p:txBody>
-      </p:sp>
-      <p:sp>
-        <p:nvSpPr>
-          <p:cNvPr id="4" name="Rectangle 3"/>
-          <p:cNvSpPr/>
-          <p:nvPr/>
-        </p:nvSpPr>
-        <p:spPr>
-          <a:xfrm>
-            <a:off x="0" y="1078992"/>
-            <a:ext cx="12191695" cy="38100"/>
-          </a:xfrm>
-          <a:prstGeom prst="rect">
-            <a:avLst/>
-          </a:prstGeom>
-          <a:solidFill>
-            <a:srgbClr val="149EC8"/>
-          </a:solidFill>
-          <a:ln>
-            <a:noFill/>
-          </a:ln>
-          <a:effectLst/>
-        </p:spPr>
-        <p:style>
-          <a:lnRef idx="1">
-            <a:schemeClr val="accent1"/>
-          </a:lnRef>
-          <a:fillRef idx="3">
-            <a:schemeClr val="accent1"/>
-          </a:fillRef>
-          <a:effectRef idx="2">
-            <a:schemeClr val="accent1"/>
-          </a:effectRef>
-          <a:fontRef idx="minor">
-            <a:schemeClr val="lt1"/>
-          </a:fontRef>
-        </p:style>
-        <p:txBody>
-          <a:bodyPr rtlCol="0" anchor="ctr"/>
-          <a:lstStyle/>
-          <a:p>
-            <a:pPr algn="ctr"/>
-          </a:p>
-        </p:txBody>
-      </p:sp>
-      <p:sp>
-        <p:nvSpPr>
-          <p:cNvPr id="5" name="Rectangle 4"/>
-          <p:cNvSpPr/>
-          <p:nvPr/>
-        </p:nvSpPr>
-        <p:spPr>
-          <a:xfrm>
-            <a:off x="0" y="0"/>
-            <a:ext cx="127000" cy="1143000"/>
-          </a:xfrm>
-          <a:prstGeom prst="rect">
-            <a:avLst/>
-          </a:prstGeom>
-          <a:solidFill>
-            <a:srgbClr val="149EC8"/>
-          </a:solidFill>
-          <a:ln>
-            <a:noFill/>
-          </a:ln>
-          <a:effectLst/>
-        </p:spPr>
-        <p:style>
-          <a:lnRef idx="1">
-            <a:schemeClr val="accent1"/>
-          </a:lnRef>
-          <a:fillRef idx="3">
-            <a:schemeClr val="accent1"/>
-          </a:fillRef>
-          <a:effectRef idx="2">
-            <a:schemeClr val="accent1"/>
-          </a:effectRef>
-          <a:fontRef idx="minor">
-            <a:schemeClr val="lt1"/>
-          </a:fontRef>
-        </p:style>
-        <p:txBody>
-          <a:bodyPr rtlCol="0" anchor="ctr"/>
-          <a:lstStyle/>
-          <a:p>
-            <a:pPr algn="ctr"/>
-          </a:p>
-        </p:txBody>
-      </p:sp>
-      <p:sp>
-        <p:nvSpPr>
-          <p:cNvPr id="6" name="TextBox 5"/>
-          <p:cNvSpPr txBox="1"/>
-          <p:nvPr/>
-        </p:nvSpPr>
-        <p:spPr>
-          <a:xfrm>
-            <a:off x="502920" y="164592"/>
-            <a:ext cx="10972800" cy="365760"/>
-          </a:xfrm>
-          <a:prstGeom prst="rect">
-            <a:avLst/>
-          </a:prstGeom>
-          <a:noFill/>
-        </p:spPr>
-        <p:txBody>
-          <a:bodyPr wrap="square" anchor="t">
-            <a:spAutoFit/>
-          </a:bodyPr>
-          <a:lstStyle/>
-          <a:p>
-            <a:pPr algn="l">
-              <a:lnSpc>
-                <a:spcPct val="100000"/>
-              </a:lnSpc>
-              <a:spcAft>
-                <a:spcPts val="600"/>
-              </a:spcAft>
-            </a:pPr>
-            <a:r>
-              <a:rPr sz="1200" b="1" i="0">
-                <a:solidFill>
-                  <a:srgbClr val="149EC8"/>
-                </a:solidFill>
-                <a:latin typeface="Calibri"/>
-              </a:rPr>
-              <a:t>GRAPHRAG PATH</a:t>
-            </a:r>
-          </a:p>
-        </p:txBody>
-      </p:sp>
-      <p:sp>
-        <p:nvSpPr>
-          <p:cNvPr id="7" name="TextBox 6"/>
-          <p:cNvSpPr txBox="1"/>
-          <p:nvPr/>
-        </p:nvSpPr>
-        <p:spPr>
-          <a:xfrm>
-            <a:off x="457200" y="438912"/>
-            <a:ext cx="11338560" cy="640080"/>
-          </a:xfrm>
-          <a:prstGeom prst="rect">
-            <a:avLst/>
-          </a:prstGeom>
-          <a:noFill/>
-        </p:spPr>
-        <p:txBody>
-          <a:bodyPr wrap="square" anchor="t">
-            <a:spAutoFit/>
-          </a:bodyPr>
-          <a:lstStyle/>
-          <a:p>
-            <a:pPr algn="l">
-              <a:lnSpc>
-                <a:spcPct val="100000"/>
-              </a:lnSpc>
-              <a:spcAft>
-                <a:spcPts val="600"/>
-              </a:spcAft>
-            </a:pPr>
-            <a:r>
-              <a:rPr sz="2600" b="1" i="0">
-                <a:solidFill>
-                  <a:srgbClr val="0B2447"/>
-                </a:solidFill>
-                <a:latin typeface="Calibri"/>
-              </a:rPr>
-              <a:t>Microsoft GraphRAG 3.1, tuned for code</a:t>
-            </a:r>
-          </a:p>
-        </p:txBody>
-      </p:sp>
-      <p:sp>
-        <p:nvSpPr>
-          <p:cNvPr id="8" name="TextBox 7"/>
-          <p:cNvSpPr txBox="1"/>
-          <p:nvPr/>
-        </p:nvSpPr>
-        <p:spPr>
-          <a:xfrm>
-            <a:off x="548640" y="1371600"/>
-            <a:ext cx="11064240" cy="5120640"/>
-          </a:xfrm>
-          <a:prstGeom prst="rect">
-            <a:avLst/>
-          </a:prstGeom>
-          <a:noFill/>
-        </p:spPr>
-        <p:txBody>
-          <a:bodyPr wrap="square" anchor="t">
-            <a:spAutoFit/>
-          </a:bodyPr>
-          <a:lstStyle/>
-          <a:p>
-            <a:pPr algn="l">
-              <a:lnSpc>
-                <a:spcPct val="105000"/>
-              </a:lnSpc>
-              <a:spcAft>
-                <a:spcPts val="800"/>
-              </a:spcAft>
-            </a:pPr>
-            <a:r>
-              <a:rPr sz="1400" b="1" i="0">
-                <a:solidFill>
-                  <a:srgbClr val="149EC8"/>
-                </a:solidFill>
-                <a:latin typeface="Calibri"/>
-              </a:rPr>
-              <a:t>▸  </a:t>
-            </a:r>
-            <a:r>
-              <a:rPr sz="1400" b="0" i="0">
-                <a:solidFill>
-                  <a:srgbClr val="3A4A5A"/>
-                </a:solidFill>
-                <a:latin typeface="Calibri"/>
-              </a:rPr>
-              <a:t>Code-tuned config: entity_types set to the KDM-lite vocabulary (program, function, screen, copybook, datastore, job, handler).</a:t>
-            </a:r>
-          </a:p>
-          <a:p>
-            <a:pPr algn="l">
-              <a:lnSpc>
-                <a:spcPct val="105000"/>
-              </a:lnSpc>
-              <a:spcAft>
-                <a:spcPts val="800"/>
-              </a:spcAft>
-            </a:pPr>
-            <a:r>
-              <a:rPr sz="1400" b="1" i="0">
-                <a:solidFill>
-                  <a:srgbClr val="149EC8"/>
-                </a:solidFill>
-                <a:latin typeface="Calibri"/>
-              </a:rPr>
-              <a:t>▸  </a:t>
-            </a:r>
-            <a:r>
-              <a:rPr sz="1400" b="0" i="0">
-                <a:solidFill>
-                  <a:srgbClr val="3A4A5A"/>
-                </a:solidFill>
-                <a:latin typeface="Calibri"/>
-              </a:rPr>
-              <a:t>Extraction prompt rewritten with COBOL examples → emits CALLS / READS_FROM / WRITES_TO / USES_COPYBOOK / JOB_RUNS_PROGRAM.</a:t>
-            </a:r>
-          </a:p>
-          <a:p>
-            <a:pPr algn="l">
-              <a:lnSpc>
-                <a:spcPct val="105000"/>
-              </a:lnSpc>
-              <a:spcAft>
-                <a:spcPts val="800"/>
-              </a:spcAft>
-            </a:pPr>
-            <a:r>
-              <a:rPr sz="1400" b="1" i="0">
-                <a:solidFill>
-                  <a:srgbClr val="149EC8"/>
-                </a:solidFill>
-                <a:latin typeface="Calibri"/>
-              </a:rPr>
-              <a:t>▸  </a:t>
-            </a:r>
-            <a:r>
-              <a:rPr sz="1400" b="0" i="0">
-                <a:solidFill>
-                  <a:srgbClr val="3A4A5A"/>
-                </a:solidFill>
-                <a:latin typeface="Calibri"/>
-              </a:rPr>
-              <a:t>GraphML snapshot on → load the LLM-built graph into Neo4j alongside the deterministic one.</a:t>
-            </a:r>
-          </a:p>
-          <a:p>
-            <a:pPr algn="l">
-              <a:lnSpc>
-                <a:spcPct val="105000"/>
-              </a:lnSpc>
-              <a:spcAft>
-                <a:spcPts val="800"/>
-              </a:spcAft>
-            </a:pPr>
-            <a:r>
-              <a:rPr sz="1400" b="1" i="0">
-                <a:solidFill>
-                  <a:srgbClr val="149EC8"/>
-                </a:solidFill>
-                <a:latin typeface="Calibri"/>
-              </a:rPr>
-              <a:t>▸  </a:t>
-            </a:r>
-            <a:r>
-              <a:rPr sz="1400" b="1" i="0">
-                <a:solidFill>
-                  <a:srgbClr val="0B2447"/>
-                </a:solidFill>
-                <a:latin typeface="Calibri"/>
-              </a:rPr>
-              <a:t>Runs two ways:</a:t>
-            </a:r>
-          </a:p>
-          <a:p>
-            <a:pPr algn="l">
-              <a:lnSpc>
-                <a:spcPct val="105000"/>
-              </a:lnSpc>
-              <a:spcAft>
-                <a:spcPts val="800"/>
-              </a:spcAft>
-            </a:pPr>
-            <a:r>
-              <a:rPr sz="1200" b="0" i="0">
-                <a:solidFill>
-                  <a:srgbClr val="8A97A3"/>
-                </a:solidFill>
-                <a:latin typeface="Calibri"/>
-              </a:rPr>
-              <a:t>      –  </a:t>
-            </a:r>
-            <a:r>
-              <a:rPr sz="1200" b="0" i="0">
-                <a:solidFill>
-                  <a:srgbClr val="3A4A5A"/>
-                </a:solidFill>
-                <a:latin typeface="Calibri"/>
-              </a:rPr>
-              <a:t>In Claude-on-the-web sandbox: Anthropic completion, embeddings-free workflow (extract → communities → reports → global search).</a:t>
-            </a:r>
-          </a:p>
-          <a:p>
-            <a:pPr algn="l">
-              <a:lnSpc>
-                <a:spcPct val="105000"/>
-              </a:lnSpc>
-              <a:spcAft>
-                <a:spcPts val="800"/>
-              </a:spcAft>
-            </a:pPr>
-            <a:r>
-              <a:rPr sz="1200" b="0" i="0">
-                <a:solidFill>
-                  <a:srgbClr val="8A97A3"/>
-                </a:solidFill>
-                <a:latin typeface="Calibri"/>
-              </a:rPr>
-              <a:t>      –  </a:t>
-            </a:r>
-            <a:r>
-              <a:rPr sz="1200" b="0" i="0">
-                <a:solidFill>
-                  <a:srgbClr val="3A4A5A"/>
-                </a:solidFill>
-                <a:latin typeface="Calibri"/>
-              </a:rPr>
-              <a:t>Locally: OpenAI / Together with embeddings → full pipeline incl. local &amp; DRIFT search.</a:t>
-            </a:r>
-          </a:p>
-          <a:p>
-            <a:pPr algn="l">
-              <a:lnSpc>
-                <a:spcPct val="105000"/>
-              </a:lnSpc>
-              <a:spcAft>
-                <a:spcPts val="800"/>
-              </a:spcAft>
-            </a:pPr>
-            <a:r>
-              <a:rPr sz="1400" b="1" i="0">
-                <a:solidFill>
-                  <a:srgbClr val="149EC8"/>
-                </a:solidFill>
-                <a:latin typeface="Calibri"/>
-              </a:rPr>
-              <a:t>▸  </a:t>
-            </a:r>
-            <a:r>
-              <a:rPr sz="1400" b="1" i="0">
-                <a:solidFill>
-                  <a:srgbClr val="2E8B57"/>
-                </a:solidFill>
-                <a:latin typeface="Calibri"/>
-              </a:rPr>
-              <a:t>Verified end-to-end to the LLM boundary: loads docs → chunks → dispatches a Claude extraction call per document. A valid key completes the run.</a:t>
-            </a:r>
-          </a:p>
-        </p:txBody>
-      </p:sp>
-      <p:sp>
-        <p:nvSpPr>
-          <p:cNvPr id="9" name="Rectangle 8"/>
-          <p:cNvSpPr/>
-          <p:nvPr/>
-        </p:nvSpPr>
-        <p:spPr>
-          <a:xfrm>
-            <a:off x="548640" y="5943600"/>
-            <a:ext cx="11064240" cy="548640"/>
-          </a:xfrm>
-          <a:prstGeom prst="rect">
-            <a:avLst/>
-          </a:prstGeom>
-          <a:solidFill>
-            <a:srgbClr val="0B2447"/>
-          </a:solidFill>
-          <a:ln>
-            <a:noFill/>
-          </a:ln>
-          <a:effectLst/>
-        </p:spPr>
-        <p:style>
-          <a:lnRef idx="1">
-            <a:schemeClr val="accent1"/>
-          </a:lnRef>
-          <a:fillRef idx="3">
-            <a:schemeClr val="accent1"/>
-          </a:fillRef>
-          <a:effectRef idx="2">
-            <a:schemeClr val="accent1"/>
-          </a:effectRef>
-          <a:fontRef idx="minor">
-            <a:schemeClr val="lt1"/>
-          </a:fontRef>
-        </p:style>
-        <p:txBody>
-          <a:bodyPr rtlCol="0" anchor="ctr"/>
-          <a:lstStyle/>
-          <a:p>
-            <a:pPr algn="ctr"/>
-          </a:p>
-        </p:txBody>
-      </p:sp>
-      <p:sp>
-        <p:nvSpPr>
-          <p:cNvPr id="10" name="TextBox 9"/>
-          <p:cNvSpPr txBox="1"/>
-          <p:nvPr/>
-        </p:nvSpPr>
-        <p:spPr>
-          <a:xfrm>
-            <a:off x="731520" y="6016752"/>
-            <a:ext cx="10698480" cy="411480"/>
-          </a:xfrm>
-          <a:prstGeom prst="rect">
-            <a:avLst/>
-          </a:prstGeom>
-          <a:noFill/>
-        </p:spPr>
-        <p:txBody>
-          <a:bodyPr wrap="square" anchor="t">
-            <a:spAutoFit/>
-          </a:bodyPr>
-          <a:lstStyle/>
-          <a:p>
-            <a:pPr algn="l">
-              <a:lnSpc>
-                <a:spcPct val="100000"/>
-              </a:lnSpc>
-              <a:spcAft>
-                <a:spcPts val="600"/>
-              </a:spcAft>
-            </a:pPr>
-            <a:r>
-              <a:rPr sz="1300" b="1" i="0">
-                <a:solidFill>
-                  <a:srgbClr val="E89B1D"/>
-                </a:solidFill>
-                <a:latin typeface="Calibri"/>
-              </a:rPr>
-              <a:t>Network reality:  </a:t>
-            </a:r>
-            <a:r>
-              <a:rPr sz="1300" b="0" i="0">
-                <a:solidFill>
-                  <a:srgbClr val="FFFFFF"/>
-                </a:solidFill>
-                <a:latin typeface="Calibri"/>
-              </a:rPr>
-              <a:t>sandbox allowlists Anthropic only; OpenAI/Together hosts run locally. Config documents both paths.</a:t>
-            </a:r>
-          </a:p>
-        </p:txBody>
-      </p:sp>
-    </p:spTree>
-  </p:cSld>
-  <p:clrMapOvr>
-    <a:masterClrMapping/>
-  </p:clrMapOvr>
-</p:sld>
-</file>
-
 <file path=ppt/slides/slide9.xml><?xml version="1.0" encoding="utf-8"?>
 <p:sld xmlns:a="http://schemas.openxmlformats.org/drawingml/2006/main" xmlns:p="http://schemas.openxmlformats.org/presentationml/2006/main" xmlns:r="http://schemas.openxmlformats.org/officeDocument/2006/relationships">
   <p:cSld>
@@ -12050,7 +11912,7 @@
                 </a:solidFill>
                 <a:latin typeface="Calibri"/>
               </a:rPr>
-              <a:t>TRANSITION TO TCS / MASTERCRAFT</a:t>
+              <a:t>GRAPHRAG PATH</a:t>
             </a:r>
           </a:p>
         </p:txBody>
@@ -12092,32 +11954,249 @@
                 </a:solidFill>
                 <a:latin typeface="Calibri"/>
               </a:rPr>
-              <a:t>One box changes — everything downstream is reused</a:t>
-            </a:r>
-          </a:p>
-        </p:txBody>
-      </p:sp>
-      <p:sp>
-        <p:nvSpPr>
-          <p:cNvPr id="8" name="Rectangle 7"/>
+              <a:t>Microsoft GraphRAG 3.1, tuned for code</a:t>
+            </a:r>
+          </a:p>
+        </p:txBody>
+      </p:sp>
+      <p:sp>
+        <p:nvSpPr>
+          <p:cNvPr id="8" name="TextBox 7"/>
+          <p:cNvSpPr txBox="1"/>
+          <p:nvPr/>
+        </p:nvSpPr>
+        <p:spPr>
+          <a:xfrm>
+            <a:off x="548640" y="1371600"/>
+            <a:ext cx="11064240" cy="5120640"/>
+          </a:xfrm>
+          <a:prstGeom prst="rect">
+            <a:avLst/>
+          </a:prstGeom>
+          <a:noFill/>
+        </p:spPr>
+        <p:txBody>
+          <a:bodyPr wrap="square" anchor="t">
+            <a:spAutoFit/>
+          </a:bodyPr>
+          <a:lstStyle/>
+          <a:p>
+            <a:pPr algn="l">
+              <a:lnSpc>
+                <a:spcPct val="105000"/>
+              </a:lnSpc>
+              <a:spcAft>
+                <a:spcPts val="800"/>
+              </a:spcAft>
+            </a:pPr>
+            <a:r>
+              <a:rPr sz="1400" b="1" i="0">
+                <a:solidFill>
+                  <a:srgbClr val="149EC8"/>
+                </a:solidFill>
+                <a:latin typeface="Calibri"/>
+              </a:rPr>
+              <a:t>▸  </a:t>
+            </a:r>
+            <a:r>
+              <a:rPr sz="1400" b="0" i="0">
+                <a:solidFill>
+                  <a:srgbClr val="3A4A5A"/>
+                </a:solidFill>
+                <a:latin typeface="Calibri"/>
+              </a:rPr>
+              <a:t>Code-tuned config: entity_types set to the KDM-lite vocabulary (program, function, screen, copybook, datastore, job, handler).</a:t>
+            </a:r>
+          </a:p>
+          <a:p>
+            <a:pPr algn="l">
+              <a:lnSpc>
+                <a:spcPct val="105000"/>
+              </a:lnSpc>
+              <a:spcAft>
+                <a:spcPts val="800"/>
+              </a:spcAft>
+            </a:pPr>
+            <a:r>
+              <a:rPr sz="1400" b="1" i="0">
+                <a:solidFill>
+                  <a:srgbClr val="149EC8"/>
+                </a:solidFill>
+                <a:latin typeface="Calibri"/>
+              </a:rPr>
+              <a:t>▸  </a:t>
+            </a:r>
+            <a:r>
+              <a:rPr sz="1400" b="0" i="0">
+                <a:solidFill>
+                  <a:srgbClr val="3A4A5A"/>
+                </a:solidFill>
+                <a:latin typeface="Calibri"/>
+              </a:rPr>
+              <a:t>Extraction prompt rewritten with COBOL examples → emits CALLS / READS_FROM / WRITES_TO / USES_COPYBOOK / JOB_RUNS_PROGRAM.</a:t>
+            </a:r>
+          </a:p>
+          <a:p>
+            <a:pPr algn="l">
+              <a:lnSpc>
+                <a:spcPct val="105000"/>
+              </a:lnSpc>
+              <a:spcAft>
+                <a:spcPts val="800"/>
+              </a:spcAft>
+            </a:pPr>
+            <a:r>
+              <a:rPr sz="1400" b="1" i="0">
+                <a:solidFill>
+                  <a:srgbClr val="149EC8"/>
+                </a:solidFill>
+                <a:latin typeface="Calibri"/>
+              </a:rPr>
+              <a:t>▸  </a:t>
+            </a:r>
+            <a:r>
+              <a:rPr sz="1400" b="0" i="0">
+                <a:solidFill>
+                  <a:srgbClr val="3A4A5A"/>
+                </a:solidFill>
+                <a:latin typeface="Calibri"/>
+              </a:rPr>
+              <a:t>GraphML snapshot on → load the LLM-built graph into Neo4j alongside the deterministic one.</a:t>
+            </a:r>
+          </a:p>
+          <a:p>
+            <a:pPr algn="l">
+              <a:lnSpc>
+                <a:spcPct val="105000"/>
+              </a:lnSpc>
+              <a:spcAft>
+                <a:spcPts val="800"/>
+              </a:spcAft>
+            </a:pPr>
+            <a:r>
+              <a:rPr sz="1400" b="1" i="0">
+                <a:solidFill>
+                  <a:srgbClr val="149EC8"/>
+                </a:solidFill>
+                <a:latin typeface="Calibri"/>
+              </a:rPr>
+              <a:t>▸  </a:t>
+            </a:r>
+            <a:r>
+              <a:rPr sz="1400" b="1" i="0">
+                <a:solidFill>
+                  <a:srgbClr val="0B2447"/>
+                </a:solidFill>
+                <a:latin typeface="Calibri"/>
+              </a:rPr>
+              <a:t>Runs two ways:</a:t>
+            </a:r>
+          </a:p>
+          <a:p>
+            <a:pPr algn="l">
+              <a:lnSpc>
+                <a:spcPct val="105000"/>
+              </a:lnSpc>
+              <a:spcAft>
+                <a:spcPts val="800"/>
+              </a:spcAft>
+            </a:pPr>
+            <a:r>
+              <a:rPr sz="1200" b="0" i="0">
+                <a:solidFill>
+                  <a:srgbClr val="8A97A3"/>
+                </a:solidFill>
+                <a:latin typeface="Calibri"/>
+              </a:rPr>
+              <a:t>      –  </a:t>
+            </a:r>
+            <a:r>
+              <a:rPr sz="1200" b="0" i="0">
+                <a:solidFill>
+                  <a:srgbClr val="3A4A5A"/>
+                </a:solidFill>
+                <a:latin typeface="Calibri"/>
+              </a:rPr>
+              <a:t>In Claude-on-the-web sandbox: Anthropic completion, embeddings-free workflow (extract → communities → reports → global search).</a:t>
+            </a:r>
+          </a:p>
+          <a:p>
+            <a:pPr algn="l">
+              <a:lnSpc>
+                <a:spcPct val="105000"/>
+              </a:lnSpc>
+              <a:spcAft>
+                <a:spcPts val="800"/>
+              </a:spcAft>
+            </a:pPr>
+            <a:r>
+              <a:rPr sz="1200" b="0" i="0">
+                <a:solidFill>
+                  <a:srgbClr val="8A97A3"/>
+                </a:solidFill>
+                <a:latin typeface="Calibri"/>
+              </a:rPr>
+              <a:t>      –  </a:t>
+            </a:r>
+            <a:r>
+              <a:rPr sz="1200" b="0" i="0">
+                <a:solidFill>
+                  <a:srgbClr val="3A4A5A"/>
+                </a:solidFill>
+                <a:latin typeface="Calibri"/>
+              </a:rPr>
+              <a:t>Locally: OpenAI / Together with embeddings → full pipeline incl. local &amp; DRIFT search.</a:t>
+            </a:r>
+          </a:p>
+          <a:p>
+            <a:pPr algn="l">
+              <a:lnSpc>
+                <a:spcPct val="105000"/>
+              </a:lnSpc>
+              <a:spcAft>
+                <a:spcPts val="800"/>
+              </a:spcAft>
+            </a:pPr>
+            <a:r>
+              <a:rPr sz="1400" b="1" i="0">
+                <a:solidFill>
+                  <a:srgbClr val="149EC8"/>
+                </a:solidFill>
+                <a:latin typeface="Calibri"/>
+              </a:rPr>
+              <a:t>▸  </a:t>
+            </a:r>
+            <a:r>
+              <a:rPr sz="1400" b="1" i="0">
+                <a:solidFill>
+                  <a:srgbClr val="2E8B57"/>
+                </a:solidFill>
+                <a:latin typeface="Calibri"/>
+              </a:rPr>
+              <a:t>Verified end-to-end to the LLM boundary: loads docs → chunks → dispatches a Claude extraction call per document. A valid key completes the run.</a:t>
+            </a:r>
+          </a:p>
+        </p:txBody>
+      </p:sp>
+      <p:sp>
+        <p:nvSpPr>
+          <p:cNvPr id="9" name="Rectangle 8"/>
           <p:cNvSpPr/>
           <p:nvPr/>
         </p:nvSpPr>
         <p:spPr>
           <a:xfrm>
-            <a:off x="640080" y="1554480"/>
-            <a:ext cx="2514600" cy="1371600"/>
+            <a:off x="548640" y="5943600"/>
+            <a:ext cx="11064240" cy="548640"/>
           </a:xfrm>
           <a:prstGeom prst="rect">
             <a:avLst/>
           </a:prstGeom>
           <a:solidFill>
-            <a:srgbClr val="E89B1D"/>
+            <a:srgbClr val="0B2447"/>
           </a:solidFill>
-          <a:ln w="31750">
-            <a:solidFill>
-              <a:srgbClr val="E89B1D"/>
-            </a:solidFill>
+          <a:ln>
+            <a:noFill/>
           </a:ln>
           <a:effectLst/>
         </p:spPr>
@@ -12145,14 +12224,14 @@
       </p:sp>
       <p:sp>
         <p:nvSpPr>
-          <p:cNvPr id="9" name="TextBox 8"/>
+          <p:cNvPr id="10" name="TextBox 9"/>
           <p:cNvSpPr txBox="1"/>
           <p:nvPr/>
         </p:nvSpPr>
         <p:spPr>
           <a:xfrm>
-            <a:off x="731520" y="1874520"/>
-            <a:ext cx="2331720" cy="822960"/>
+            <a:off x="731520" y="6016752"/>
+            <a:ext cx="10698480" cy="411480"/>
           </a:xfrm>
           <a:prstGeom prst="rect">
             <a:avLst/>
@@ -12165,121 +12244,7 @@
           </a:bodyPr>
           <a:lstStyle/>
           <a:p>
-            <a:pPr algn="ctr">
-              <a:lnSpc>
-                <a:spcPct val="100000"/>
-              </a:lnSpc>
-              <a:spcAft>
-                <a:spcPts val="200"/>
-              </a:spcAft>
-            </a:pPr>
-            <a:r>
-              <a:rPr sz="1400" b="1" i="0">
-                <a:solidFill>
-                  <a:srgbClr val="FFFFFF"/>
-                </a:solidFill>
-                <a:latin typeface="Calibri"/>
-              </a:rPr>
-              <a:t>MasterCraft</a:t>
-            </a:r>
-          </a:p>
-          <a:p>
-            <a:pPr algn="ctr">
-              <a:lnSpc>
-                <a:spcPct val="100000"/>
-              </a:lnSpc>
-              <a:spcAft>
-                <a:spcPts val="200"/>
-              </a:spcAft>
-            </a:pPr>
-            <a:r>
-              <a:rPr sz="1400" b="1" i="0">
-                <a:solidFill>
-                  <a:srgbClr val="FFFFFF"/>
-                </a:solidFill>
-                <a:latin typeface="Calibri"/>
-              </a:rPr>
-              <a:t>inventory export</a:t>
-            </a:r>
-          </a:p>
-        </p:txBody>
-      </p:sp>
-      <p:sp>
-        <p:nvSpPr>
-          <p:cNvPr id="10" name="Rectangle 9"/>
-          <p:cNvSpPr/>
-          <p:nvPr/>
-        </p:nvSpPr>
-        <p:spPr>
-          <a:xfrm>
-            <a:off x="1097280" y="1170432"/>
-            <a:ext cx="1600200" cy="347472"/>
-          </a:xfrm>
-          <a:prstGeom prst="rect">
-            <a:avLst/>
-          </a:prstGeom>
-          <a:solidFill>
-            <a:srgbClr val="E89B1D"/>
-          </a:solidFill>
-          <a:ln>
-            <a:noFill/>
-          </a:ln>
-          <a:effectLst/>
-        </p:spPr>
-        <p:style>
-          <a:lnRef idx="1">
-            <a:schemeClr val="accent1"/>
-          </a:lnRef>
-          <a:fillRef idx="3">
-            <a:schemeClr val="accent1"/>
-          </a:fillRef>
-          <a:effectRef idx="2">
-            <a:schemeClr val="accent1"/>
-          </a:effectRef>
-          <a:fontRef idx="minor">
-            <a:schemeClr val="lt1"/>
-          </a:fontRef>
-        </p:style>
-        <p:txBody>
-          <a:bodyPr rtlCol="0" anchor="ctr" wrap="square"/>
-          <a:lstStyle/>
-          <a:p>
-            <a:pPr algn="ctr"/>
-            <a:r>
-              <a:rPr sz="1000" b="1" i="0">
-                <a:solidFill>
-                  <a:srgbClr val="0B2447"/>
-                </a:solidFill>
-                <a:latin typeface="Calibri"/>
-              </a:rPr>
-              <a:t>CHANGES</a:t>
-            </a:r>
-          </a:p>
-        </p:txBody>
-      </p:sp>
-      <p:sp>
-        <p:nvSpPr>
-          <p:cNvPr id="11" name="TextBox 10"/>
-          <p:cNvSpPr txBox="1"/>
-          <p:nvPr/>
-        </p:nvSpPr>
-        <p:spPr>
-          <a:xfrm>
-            <a:off x="3154680" y="2011680"/>
-            <a:ext cx="320040" cy="457200"/>
-          </a:xfrm>
-          <a:prstGeom prst="rect">
-            <a:avLst/>
-          </a:prstGeom>
-          <a:noFill/>
-        </p:spPr>
-        <p:txBody>
-          <a:bodyPr wrap="square" anchor="t">
-            <a:spAutoFit/>
-          </a:bodyPr>
-          <a:lstStyle/>
-          <a:p>
-            <a:pPr algn="ctr">
+            <a:pPr algn="l">
               <a:lnSpc>
                 <a:spcPct val="100000"/>
               </a:lnSpc>
@@ -12288,665 +12253,22 @@
               </a:spcAft>
             </a:pPr>
             <a:r>
-              <a:rPr sz="1800" b="1" i="0">
-                <a:solidFill>
-                  <a:srgbClr val="3A4A5A"/>
-                </a:solidFill>
-                <a:latin typeface="Calibri"/>
-              </a:rPr>
-              <a:t>▶</a:t>
-            </a:r>
-          </a:p>
-        </p:txBody>
-      </p:sp>
-      <p:sp>
-        <p:nvSpPr>
-          <p:cNvPr id="12" name="Rectangle 11"/>
-          <p:cNvSpPr/>
-          <p:nvPr/>
-        </p:nvSpPr>
-        <p:spPr>
-          <a:xfrm>
-            <a:off x="3474720" y="1554480"/>
-            <a:ext cx="2514600" cy="1371600"/>
-          </a:xfrm>
-          <a:prstGeom prst="rect">
-            <a:avLst/>
-          </a:prstGeom>
-          <a:solidFill>
-            <a:srgbClr val="149EC8"/>
-          </a:solidFill>
-          <a:ln w="31750">
-            <a:solidFill>
-              <a:srgbClr val="149EC8"/>
-            </a:solidFill>
-          </a:ln>
-          <a:effectLst/>
-        </p:spPr>
-        <p:style>
-          <a:lnRef idx="1">
-            <a:schemeClr val="accent1"/>
-          </a:lnRef>
-          <a:fillRef idx="3">
-            <a:schemeClr val="accent1"/>
-          </a:fillRef>
-          <a:effectRef idx="2">
-            <a:schemeClr val="accent1"/>
-          </a:effectRef>
-          <a:fontRef idx="minor">
-            <a:schemeClr val="lt1"/>
-          </a:fontRef>
-        </p:style>
-        <p:txBody>
-          <a:bodyPr rtlCol="0" anchor="ctr"/>
-          <a:lstStyle/>
-          <a:p>
-            <a:pPr algn="ctr"/>
-          </a:p>
-        </p:txBody>
-      </p:sp>
-      <p:sp>
-        <p:nvSpPr>
-          <p:cNvPr id="13" name="TextBox 12"/>
-          <p:cNvSpPr txBox="1"/>
-          <p:nvPr/>
-        </p:nvSpPr>
-        <p:spPr>
-          <a:xfrm>
-            <a:off x="3566160" y="1874520"/>
-            <a:ext cx="2331720" cy="822960"/>
-          </a:xfrm>
-          <a:prstGeom prst="rect">
-            <a:avLst/>
-          </a:prstGeom>
-          <a:noFill/>
-        </p:spPr>
-        <p:txBody>
-          <a:bodyPr wrap="square" anchor="t">
-            <a:spAutoFit/>
-          </a:bodyPr>
-          <a:lstStyle/>
-          <a:p>
-            <a:pPr algn="ctr">
-              <a:lnSpc>
-                <a:spcPct val="100000"/>
-              </a:lnSpc>
-              <a:spcAft>
-                <a:spcPts val="200"/>
-              </a:spcAft>
-            </a:pPr>
-            <a:r>
-              <a:rPr sz="1400" b="1" i="0">
+              <a:rPr sz="1300" b="1" i="0">
+                <a:solidFill>
+                  <a:srgbClr val="E89B1D"/>
+                </a:solidFill>
+                <a:latin typeface="Calibri"/>
+              </a:rPr>
+              <a:t>Network reality:  </a:t>
+            </a:r>
+            <a:r>
+              <a:rPr sz="1300" b="0" i="0">
                 <a:solidFill>
                   <a:srgbClr val="FFFFFF"/>
                 </a:solidFill>
                 <a:latin typeface="Calibri"/>
               </a:rPr>
-              <a:t>Adapter</a:t>
-            </a:r>
-          </a:p>
-          <a:p>
-            <a:pPr algn="ctr">
-              <a:lnSpc>
-                <a:spcPct val="100000"/>
-              </a:lnSpc>
-              <a:spcAft>
-                <a:spcPts val="200"/>
-              </a:spcAft>
-            </a:pPr>
-            <a:r>
-              <a:rPr sz="1400" b="1" i="0">
-                <a:solidFill>
-                  <a:srgbClr val="FFFFFF"/>
-                </a:solidFill>
-                <a:latin typeface="Calibri"/>
-              </a:rPr>
-              <a:t>(maps to KDM-lite)</a:t>
-            </a:r>
-          </a:p>
-        </p:txBody>
-      </p:sp>
-      <p:sp>
-        <p:nvSpPr>
-          <p:cNvPr id="14" name="Rectangle 13"/>
-          <p:cNvSpPr/>
-          <p:nvPr/>
-        </p:nvSpPr>
-        <p:spPr>
-          <a:xfrm>
-            <a:off x="3931920" y="1170432"/>
-            <a:ext cx="1600200" cy="347472"/>
-          </a:xfrm>
-          <a:prstGeom prst="rect">
-            <a:avLst/>
-          </a:prstGeom>
-          <a:solidFill>
-            <a:srgbClr val="E89B1D"/>
-          </a:solidFill>
-          <a:ln>
-            <a:noFill/>
-          </a:ln>
-          <a:effectLst/>
-        </p:spPr>
-        <p:style>
-          <a:lnRef idx="1">
-            <a:schemeClr val="accent1"/>
-          </a:lnRef>
-          <a:fillRef idx="3">
-            <a:schemeClr val="accent1"/>
-          </a:fillRef>
-          <a:effectRef idx="2">
-            <a:schemeClr val="accent1"/>
-          </a:effectRef>
-          <a:fontRef idx="minor">
-            <a:schemeClr val="lt1"/>
-          </a:fontRef>
-        </p:style>
-        <p:txBody>
-          <a:bodyPr rtlCol="0" anchor="ctr" wrap="square"/>
-          <a:lstStyle/>
-          <a:p>
-            <a:pPr algn="ctr"/>
-            <a:r>
-              <a:rPr sz="1000" b="1" i="0">
-                <a:solidFill>
-                  <a:srgbClr val="0B2447"/>
-                </a:solidFill>
-                <a:latin typeface="Calibri"/>
-              </a:rPr>
-              <a:t>CHANGES</a:t>
-            </a:r>
-          </a:p>
-        </p:txBody>
-      </p:sp>
-      <p:sp>
-        <p:nvSpPr>
-          <p:cNvPr id="15" name="TextBox 14"/>
-          <p:cNvSpPr txBox="1"/>
-          <p:nvPr/>
-        </p:nvSpPr>
-        <p:spPr>
-          <a:xfrm>
-            <a:off x="5989320" y="2011680"/>
-            <a:ext cx="320040" cy="457200"/>
-          </a:xfrm>
-          <a:prstGeom prst="rect">
-            <a:avLst/>
-          </a:prstGeom>
-          <a:noFill/>
-        </p:spPr>
-        <p:txBody>
-          <a:bodyPr wrap="square" anchor="t">
-            <a:spAutoFit/>
-          </a:bodyPr>
-          <a:lstStyle/>
-          <a:p>
-            <a:pPr algn="ctr">
-              <a:lnSpc>
-                <a:spcPct val="100000"/>
-              </a:lnSpc>
-              <a:spcAft>
-                <a:spcPts val="600"/>
-              </a:spcAft>
-            </a:pPr>
-            <a:r>
-              <a:rPr sz="1800" b="1" i="0">
-                <a:solidFill>
-                  <a:srgbClr val="3A4A5A"/>
-                </a:solidFill>
-                <a:latin typeface="Calibri"/>
-              </a:rPr>
-              <a:t>▶</a:t>
-            </a:r>
-          </a:p>
-        </p:txBody>
-      </p:sp>
-      <p:sp>
-        <p:nvSpPr>
-          <p:cNvPr id="16" name="Rectangle 15"/>
-          <p:cNvSpPr/>
-          <p:nvPr/>
-        </p:nvSpPr>
-        <p:spPr>
-          <a:xfrm>
-            <a:off x="6309360" y="1554480"/>
-            <a:ext cx="2514600" cy="1371600"/>
-          </a:xfrm>
-          <a:prstGeom prst="rect">
-            <a:avLst/>
-          </a:prstGeom>
-          <a:solidFill>
-            <a:srgbClr val="FFFFFF"/>
-          </a:solidFill>
-          <a:ln w="31750">
-            <a:solidFill>
-              <a:srgbClr val="0B2447"/>
-            </a:solidFill>
-          </a:ln>
-          <a:effectLst/>
-        </p:spPr>
-        <p:style>
-          <a:lnRef idx="1">
-            <a:schemeClr val="accent1"/>
-          </a:lnRef>
-          <a:fillRef idx="3">
-            <a:schemeClr val="accent1"/>
-          </a:fillRef>
-          <a:effectRef idx="2">
-            <a:schemeClr val="accent1"/>
-          </a:effectRef>
-          <a:fontRef idx="minor">
-            <a:schemeClr val="lt1"/>
-          </a:fontRef>
-        </p:style>
-        <p:txBody>
-          <a:bodyPr rtlCol="0" anchor="ctr"/>
-          <a:lstStyle/>
-          <a:p>
-            <a:pPr algn="ctr"/>
-          </a:p>
-        </p:txBody>
-      </p:sp>
-      <p:sp>
-        <p:nvSpPr>
-          <p:cNvPr id="17" name="TextBox 16"/>
-          <p:cNvSpPr txBox="1"/>
-          <p:nvPr/>
-        </p:nvSpPr>
-        <p:spPr>
-          <a:xfrm>
-            <a:off x="6400800" y="1874520"/>
-            <a:ext cx="2331720" cy="822960"/>
-          </a:xfrm>
-          <a:prstGeom prst="rect">
-            <a:avLst/>
-          </a:prstGeom>
-          <a:noFill/>
-        </p:spPr>
-        <p:txBody>
-          <a:bodyPr wrap="square" anchor="t">
-            <a:spAutoFit/>
-          </a:bodyPr>
-          <a:lstStyle/>
-          <a:p>
-            <a:pPr algn="ctr">
-              <a:lnSpc>
-                <a:spcPct val="100000"/>
-              </a:lnSpc>
-              <a:spcAft>
-                <a:spcPts val="200"/>
-              </a:spcAft>
-            </a:pPr>
-            <a:r>
-              <a:rPr sz="1400" b="1" i="0">
-                <a:solidFill>
-                  <a:srgbClr val="0B2447"/>
-                </a:solidFill>
-                <a:latin typeface="Calibri"/>
-              </a:rPr>
-              <a:t>Same graph.json</a:t>
-            </a:r>
-          </a:p>
-        </p:txBody>
-      </p:sp>
-      <p:sp>
-        <p:nvSpPr>
-          <p:cNvPr id="18" name="Rectangle 17"/>
-          <p:cNvSpPr/>
-          <p:nvPr/>
-        </p:nvSpPr>
-        <p:spPr>
-          <a:xfrm>
-            <a:off x="6812280" y="1170432"/>
-            <a:ext cx="1508760" cy="347472"/>
-          </a:xfrm>
-          <a:prstGeom prst="rect">
-            <a:avLst/>
-          </a:prstGeom>
-          <a:solidFill>
-            <a:srgbClr val="2E8B57"/>
-          </a:solidFill>
-          <a:ln>
-            <a:noFill/>
-          </a:ln>
-          <a:effectLst/>
-        </p:spPr>
-        <p:style>
-          <a:lnRef idx="1">
-            <a:schemeClr val="accent1"/>
-          </a:lnRef>
-          <a:fillRef idx="3">
-            <a:schemeClr val="accent1"/>
-          </a:fillRef>
-          <a:effectRef idx="2">
-            <a:schemeClr val="accent1"/>
-          </a:effectRef>
-          <a:fontRef idx="minor">
-            <a:schemeClr val="lt1"/>
-          </a:fontRef>
-        </p:style>
-        <p:txBody>
-          <a:bodyPr rtlCol="0" anchor="ctr" wrap="square"/>
-          <a:lstStyle/>
-          <a:p>
-            <a:pPr algn="ctr"/>
-            <a:r>
-              <a:rPr sz="1000" b="1" i="0">
-                <a:solidFill>
-                  <a:srgbClr val="FFFFFF"/>
-                </a:solidFill>
-                <a:latin typeface="Calibri"/>
-              </a:rPr>
-              <a:t>REUSED</a:t>
-            </a:r>
-          </a:p>
-        </p:txBody>
-      </p:sp>
-      <p:sp>
-        <p:nvSpPr>
-          <p:cNvPr id="19" name="TextBox 18"/>
-          <p:cNvSpPr txBox="1"/>
-          <p:nvPr/>
-        </p:nvSpPr>
-        <p:spPr>
-          <a:xfrm>
-            <a:off x="8823960" y="2011680"/>
-            <a:ext cx="320040" cy="457200"/>
-          </a:xfrm>
-          <a:prstGeom prst="rect">
-            <a:avLst/>
-          </a:prstGeom>
-          <a:noFill/>
-        </p:spPr>
-        <p:txBody>
-          <a:bodyPr wrap="square" anchor="t">
-            <a:spAutoFit/>
-          </a:bodyPr>
-          <a:lstStyle/>
-          <a:p>
-            <a:pPr algn="ctr">
-              <a:lnSpc>
-                <a:spcPct val="100000"/>
-              </a:lnSpc>
-              <a:spcAft>
-                <a:spcPts val="600"/>
-              </a:spcAft>
-            </a:pPr>
-            <a:r>
-              <a:rPr sz="1800" b="1" i="0">
-                <a:solidFill>
-                  <a:srgbClr val="3A4A5A"/>
-                </a:solidFill>
-                <a:latin typeface="Calibri"/>
-              </a:rPr>
-              <a:t>▶</a:t>
-            </a:r>
-          </a:p>
-        </p:txBody>
-      </p:sp>
-      <p:sp>
-        <p:nvSpPr>
-          <p:cNvPr id="20" name="Rectangle 19"/>
-          <p:cNvSpPr/>
-          <p:nvPr/>
-        </p:nvSpPr>
-        <p:spPr>
-          <a:xfrm>
-            <a:off x="9144000" y="1554480"/>
-            <a:ext cx="2514600" cy="1371600"/>
-          </a:xfrm>
-          <a:prstGeom prst="rect">
-            <a:avLst/>
-          </a:prstGeom>
-          <a:solidFill>
-            <a:srgbClr val="FFFFFF"/>
-          </a:solidFill>
-          <a:ln w="31750">
-            <a:solidFill>
-              <a:srgbClr val="3A4A5A"/>
-            </a:solidFill>
-          </a:ln>
-          <a:effectLst/>
-        </p:spPr>
-        <p:style>
-          <a:lnRef idx="1">
-            <a:schemeClr val="accent1"/>
-          </a:lnRef>
-          <a:fillRef idx="3">
-            <a:schemeClr val="accent1"/>
-          </a:fillRef>
-          <a:effectRef idx="2">
-            <a:schemeClr val="accent1"/>
-          </a:effectRef>
-          <a:fontRef idx="minor">
-            <a:schemeClr val="lt1"/>
-          </a:fontRef>
-        </p:style>
-        <p:txBody>
-          <a:bodyPr rtlCol="0" anchor="ctr"/>
-          <a:lstStyle/>
-          <a:p>
-            <a:pPr algn="ctr"/>
-          </a:p>
-        </p:txBody>
-      </p:sp>
-      <p:sp>
-        <p:nvSpPr>
-          <p:cNvPr id="21" name="TextBox 20"/>
-          <p:cNvSpPr txBox="1"/>
-          <p:nvPr/>
-        </p:nvSpPr>
-        <p:spPr>
-          <a:xfrm>
-            <a:off x="9235440" y="1874520"/>
-            <a:ext cx="2331720" cy="822960"/>
-          </a:xfrm>
-          <a:prstGeom prst="rect">
-            <a:avLst/>
-          </a:prstGeom>
-          <a:noFill/>
-        </p:spPr>
-        <p:txBody>
-          <a:bodyPr wrap="square" anchor="t">
-            <a:spAutoFit/>
-          </a:bodyPr>
-          <a:lstStyle/>
-          <a:p>
-            <a:pPr algn="ctr">
-              <a:lnSpc>
-                <a:spcPct val="100000"/>
-              </a:lnSpc>
-              <a:spcAft>
-                <a:spcPts val="200"/>
-              </a:spcAft>
-            </a:pPr>
-            <a:r>
-              <a:rPr sz="1400" b="1" i="0">
-                <a:solidFill>
-                  <a:srgbClr val="3A4A5A"/>
-                </a:solidFill>
-                <a:latin typeface="Calibri"/>
-              </a:rPr>
-              <a:t>Neo4j · cluster ·</a:t>
-            </a:r>
-          </a:p>
-          <a:p>
-            <a:pPr algn="ctr">
-              <a:lnSpc>
-                <a:spcPct val="100000"/>
-              </a:lnSpc>
-              <a:spcAft>
-                <a:spcPts val="200"/>
-              </a:spcAft>
-            </a:pPr>
-            <a:r>
-              <a:rPr sz="1400" b="1" i="0">
-                <a:solidFill>
-                  <a:srgbClr val="3A4A5A"/>
-                </a:solidFill>
-                <a:latin typeface="Calibri"/>
-              </a:rPr>
-              <a:t>specs · GraphRAG</a:t>
-            </a:r>
-          </a:p>
-        </p:txBody>
-      </p:sp>
-      <p:sp>
-        <p:nvSpPr>
-          <p:cNvPr id="22" name="Rectangle 21"/>
-          <p:cNvSpPr/>
-          <p:nvPr/>
-        </p:nvSpPr>
-        <p:spPr>
-          <a:xfrm>
-            <a:off x="9646920" y="1170432"/>
-            <a:ext cx="1508760" cy="347472"/>
-          </a:xfrm>
-          <a:prstGeom prst="rect">
-            <a:avLst/>
-          </a:prstGeom>
-          <a:solidFill>
-            <a:srgbClr val="2E8B57"/>
-          </a:solidFill>
-          <a:ln>
-            <a:noFill/>
-          </a:ln>
-          <a:effectLst/>
-        </p:spPr>
-        <p:style>
-          <a:lnRef idx="1">
-            <a:schemeClr val="accent1"/>
-          </a:lnRef>
-          <a:fillRef idx="3">
-            <a:schemeClr val="accent1"/>
-          </a:fillRef>
-          <a:effectRef idx="2">
-            <a:schemeClr val="accent1"/>
-          </a:effectRef>
-          <a:fontRef idx="minor">
-            <a:schemeClr val="lt1"/>
-          </a:fontRef>
-        </p:style>
-        <p:txBody>
-          <a:bodyPr rtlCol="0" anchor="ctr" wrap="square"/>
-          <a:lstStyle/>
-          <a:p>
-            <a:pPr algn="ctr"/>
-            <a:r>
-              <a:rPr sz="1000" b="1" i="0">
-                <a:solidFill>
-                  <a:srgbClr val="FFFFFF"/>
-                </a:solidFill>
-                <a:latin typeface="Calibri"/>
-              </a:rPr>
-              <a:t>REUSED</a:t>
-            </a:r>
-          </a:p>
-        </p:txBody>
-      </p:sp>
-      <p:sp>
-        <p:nvSpPr>
-          <p:cNvPr id="23" name="TextBox 22"/>
-          <p:cNvSpPr txBox="1"/>
-          <p:nvPr/>
-        </p:nvSpPr>
-        <p:spPr>
-          <a:xfrm>
-            <a:off x="548640" y="3566160"/>
-            <a:ext cx="11064240" cy="5120640"/>
-          </a:xfrm>
-          <a:prstGeom prst="rect">
-            <a:avLst/>
-          </a:prstGeom>
-          <a:noFill/>
-        </p:spPr>
-        <p:txBody>
-          <a:bodyPr wrap="square" anchor="t">
-            <a:spAutoFit/>
-          </a:bodyPr>
-          <a:lstStyle/>
-          <a:p>
-            <a:pPr algn="l">
-              <a:lnSpc>
-                <a:spcPct val="105000"/>
-              </a:lnSpc>
-              <a:spcAft>
-                <a:spcPts val="1200"/>
-              </a:spcAft>
-            </a:pPr>
-            <a:r>
-              <a:rPr sz="1500" b="1" i="0">
-                <a:solidFill>
-                  <a:srgbClr val="149EC8"/>
-                </a:solidFill>
-                <a:latin typeface="Calibri"/>
-              </a:rPr>
-              <a:t>▸  </a:t>
-            </a:r>
-            <a:r>
-              <a:rPr sz="1500" b="1" i="0">
-                <a:solidFill>
-                  <a:srgbClr val="0B2447"/>
-                </a:solidFill>
-                <a:latin typeface="Calibri"/>
-              </a:rPr>
-              <a:t>Choosing a KDM-aligned schema for the sandbox is what makes this a remapping of sources, not a redesign.</a:t>
-            </a:r>
-          </a:p>
-          <a:p>
-            <a:pPr algn="l">
-              <a:lnSpc>
-                <a:spcPct val="105000"/>
-              </a:lnSpc>
-              <a:spcAft>
-                <a:spcPts val="1200"/>
-              </a:spcAft>
-            </a:pPr>
-            <a:r>
-              <a:rPr sz="1500" b="1" i="0">
-                <a:solidFill>
-                  <a:srgbClr val="149EC8"/>
-                </a:solidFill>
-                <a:latin typeface="Calibri"/>
-              </a:rPr>
-              <a:t>▸  </a:t>
-            </a:r>
-            <a:r>
-              <a:rPr sz="1500" b="0" i="0">
-                <a:solidFill>
-                  <a:srgbClr val="3A4A5A"/>
-                </a:solidFill>
-                <a:latin typeface="Calibri"/>
-              </a:rPr>
-              <a:t>graph.json format, Neo4j loader, clustering, spec generation, GraphRAG config — all reused unchanged.</a:t>
-            </a:r>
-          </a:p>
-          <a:p>
-            <a:pPr algn="l">
-              <a:lnSpc>
-                <a:spcPct val="105000"/>
-              </a:lnSpc>
-              <a:spcAft>
-                <a:spcPts val="1200"/>
-              </a:spcAft>
-            </a:pPr>
-            <a:r>
-              <a:rPr sz="1500" b="1" i="0">
-                <a:solidFill>
-                  <a:srgbClr val="149EC8"/>
-                </a:solidFill>
-                <a:latin typeface="Calibri"/>
-              </a:rPr>
-              <a:t>▸  </a:t>
-            </a:r>
-            <a:r>
-              <a:rPr sz="1500" b="1" i="0">
-                <a:solidFill>
-                  <a:srgbClr val="2E8B57"/>
-                </a:solidFill>
-                <a:latin typeface="Calibri"/>
-              </a:rPr>
-              <a:t>De-risks the TCS engagement: the hard parts (schema, clustering, evidence, specs) are proven on open code first.</a:t>
+              <a:t>sandbox allowlists Anthropic only; OpenAI/Together hosts run locally. Config documents both paths.</a:t>
             </a:r>
           </a:p>
         </p:txBody>
